--- a/public/manuales/Capacitacion_Auditor.pptx
+++ b/public/manuales/Capacitacion_Auditor.pptx
@@ -14,7 +14,6 @@
     <p:sldId id="262" r:id="rId13"/>
     <p:sldId id="263" r:id="rId14"/>
     <p:sldId id="264" r:id="rId15"/>
-    <p:sldId id="265" r:id="rId16"/>
   </p:sldIdLst>
   <p:sldSz cx="12191695" cy="6858000" type="screen4x3"/>
   <p:notesSz cx="6858000" cy="9144000"/>
@@ -3363,217 +3362,7 @@
                 </a:solidFill>
                 <a:latin typeface="Calibri"/>
               </a:rPr>
-              <a:t>Condominio Laguna Norte  ·  Junio 2026</a:t>
-            </a:r>
-          </a:p>
-        </p:txBody>
-      </p:sp>
-    </p:spTree>
-  </p:cSld>
-  <p:clrMapOvr>
-    <a:masterClrMapping/>
-  </p:clrMapOvr>
-</p:sld>
-</file>
-
-<file path=ppt/slides/slide10.xml><?xml version="1.0" encoding="utf-8"?>
-<p:sld xmlns:a="http://schemas.openxmlformats.org/drawingml/2006/main" xmlns:p="http://schemas.openxmlformats.org/presentationml/2006/main" xmlns:r="http://schemas.openxmlformats.org/officeDocument/2006/relationships">
-  <p:cSld>
-    <p:bg>
-      <p:bgPr>
-        <a:solidFill>
-          <a:srgbClr val="0A1172"/>
-        </a:solidFill>
-        <a:effectLst/>
-      </p:bgPr>
-    </p:bg>
-    <p:spTree>
-      <p:nvGrpSpPr>
-        <p:cNvPr id="1" name=""/>
-        <p:cNvGrpSpPr/>
-        <p:nvPr/>
-      </p:nvGrpSpPr>
-      <p:grpSpPr/>
-      <p:sp>
-        <p:nvSpPr>
-          <p:cNvPr id="2" name="Rectangle 1"/>
-          <p:cNvSpPr/>
-          <p:nvPr/>
-        </p:nvSpPr>
-        <p:spPr>
-          <a:xfrm>
-            <a:off x="0" y="0"/>
-            <a:ext cx="365760" cy="6858000"/>
-          </a:xfrm>
-          <a:prstGeom prst="rect">
-            <a:avLst/>
-          </a:prstGeom>
-          <a:solidFill>
-            <a:srgbClr val="666666"/>
-          </a:solidFill>
-          <a:ln>
-            <a:noFill/>
-          </a:ln>
-          <a:effectLst/>
-        </p:spPr>
-        <p:style>
-          <a:lnRef idx="1">
-            <a:schemeClr val="accent1"/>
-          </a:lnRef>
-          <a:fillRef idx="3">
-            <a:schemeClr val="accent1"/>
-          </a:fillRef>
-          <a:effectRef idx="2">
-            <a:schemeClr val="accent1"/>
-          </a:effectRef>
-          <a:fontRef idx="minor">
-            <a:schemeClr val="lt1"/>
-          </a:fontRef>
-        </p:style>
-        <p:txBody>
-          <a:bodyPr rtlCol="0" anchor="ctr"/>
-          <a:lstStyle/>
-          <a:p>
-            <a:pPr algn="ctr"/>
-          </a:p>
-        </p:txBody>
-      </p:sp>
-      <p:sp>
-        <p:nvSpPr>
-          <p:cNvPr id="3" name="TextBox 2"/>
-          <p:cNvSpPr txBox="1"/>
-          <p:nvPr/>
-        </p:nvSpPr>
-        <p:spPr>
-          <a:xfrm>
-            <a:off x="731520" y="2286000"/>
-            <a:ext cx="10698480" cy="914400"/>
-          </a:xfrm>
-          <a:prstGeom prst="rect">
-            <a:avLst/>
-          </a:prstGeom>
-          <a:noFill/>
-        </p:spPr>
-        <p:txBody>
-          <a:bodyPr wrap="square" anchor="ctr" lIns="45720" rIns="45720">
-            <a:spAutoFit/>
-          </a:bodyPr>
-          <a:lstStyle/>
-          <a:p>
-            <a:pPr algn="ctr"/>
-            <a:r>
-              <a:rPr sz="7200" b="1">
-                <a:solidFill>
-                  <a:srgbClr val="FFFFFF"/>
-                </a:solidFill>
-                <a:latin typeface="Calibri"/>
-              </a:rPr>
-              <a:t>¡Listo!</a:t>
-            </a:r>
-          </a:p>
-        </p:txBody>
-      </p:sp>
-      <p:sp>
-        <p:nvSpPr>
-          <p:cNvPr id="4" name="TextBox 3"/>
-          <p:cNvSpPr txBox="1"/>
-          <p:nvPr/>
-        </p:nvSpPr>
-        <p:spPr>
-          <a:xfrm>
-            <a:off x="731520" y="3474720"/>
-            <a:ext cx="10698480" cy="640080"/>
-          </a:xfrm>
-          <a:prstGeom prst="rect">
-            <a:avLst/>
-          </a:prstGeom>
-          <a:noFill/>
-        </p:spPr>
-        <p:txBody>
-          <a:bodyPr wrap="square" anchor="t" lIns="45720" rIns="45720">
-            <a:spAutoFit/>
-          </a:bodyPr>
-          <a:lstStyle/>
-          <a:p>
-            <a:pPr algn="ctr"/>
-            <a:r>
-              <a:rPr sz="2200" b="0">
-                <a:solidFill>
-                  <a:srgbClr val="F1F5F9"/>
-                </a:solidFill>
-                <a:latin typeface="Calibri"/>
-              </a:rPr>
-              <a:t>Ya puedes comenzar a usar el sistema como Auditor</a:t>
-            </a:r>
-          </a:p>
-        </p:txBody>
-      </p:sp>
-      <p:sp>
-        <p:nvSpPr>
-          <p:cNvPr id="5" name="TextBox 4"/>
-          <p:cNvSpPr txBox="1"/>
-          <p:nvPr/>
-        </p:nvSpPr>
-        <p:spPr>
-          <a:xfrm>
-            <a:off x="731520" y="4754880"/>
-            <a:ext cx="10698480" cy="457200"/>
-          </a:xfrm>
-          <a:prstGeom prst="rect">
-            <a:avLst/>
-          </a:prstGeom>
-          <a:noFill/>
-        </p:spPr>
-        <p:txBody>
-          <a:bodyPr wrap="square" anchor="t" lIns="45720" rIns="45720">
-            <a:spAutoFit/>
-          </a:bodyPr>
-          <a:lstStyle/>
-          <a:p>
-            <a:pPr algn="ctr"/>
-            <a:r>
-              <a:rPr sz="1400" b="0">
-                <a:solidFill>
-                  <a:srgbClr val="F59E0B"/>
-                </a:solidFill>
-                <a:latin typeface="Calibri"/>
-              </a:rPr>
-              <a:t>Si tienes dudas, consulta el Manual de Usuario o contacta al administrador</a:t>
-            </a:r>
-          </a:p>
-        </p:txBody>
-      </p:sp>
-      <p:sp>
-        <p:nvSpPr>
-          <p:cNvPr id="6" name="TextBox 5"/>
-          <p:cNvSpPr txBox="1"/>
-          <p:nvPr/>
-        </p:nvSpPr>
-        <p:spPr>
-          <a:xfrm>
-            <a:off x="731520" y="5852160"/>
-            <a:ext cx="10698480" cy="457200"/>
-          </a:xfrm>
-          <a:prstGeom prst="rect">
-            <a:avLst/>
-          </a:prstGeom>
-          <a:noFill/>
-        </p:spPr>
-        <p:txBody>
-          <a:bodyPr wrap="square" anchor="t" lIns="45720" rIns="45720">
-            <a:spAutoFit/>
-          </a:bodyPr>
-          <a:lstStyle/>
-          <a:p>
-            <a:pPr algn="ctr"/>
-            <a:r>
-              <a:rPr sz="1400" b="1">
-                <a:solidFill>
-                  <a:srgbClr val="FFFFFF"/>
-                </a:solidFill>
-                <a:latin typeface="Calibri"/>
-              </a:rPr>
-              <a:t>asesoriasintegralescyj@gmail.com  ·  +56 964 650 643</a:t>
+              <a:t>Condominio Laguna Norte  ·  Junio 2026  ·  v1.1</a:t>
             </a:r>
           </a:p>
         </p:txBody>
@@ -3748,7 +3537,7 @@
                 </a:solidFill>
                 <a:latin typeface="Calibri"/>
               </a:rPr>
-              <a:t>Como Auditor tienes acceso de SOLO LECTURA a todos los módulos para verificar el cumplimiento de procesos.</a:t>
+              <a:t>Como Auditor tienes acceso de SOLO LECTURA a todos los módulos.</a:t>
             </a:r>
           </a:p>
         </p:txBody>
@@ -3788,7 +3577,6 @@
                 <a:solidFill>
                   <a:srgbClr val="666666"/>
                 </a:solidFill>
-                <a:latin typeface="Calibri"/>
               </a:rPr>
               <a:t>● </a:t>
             </a:r>
@@ -3797,7 +3585,6 @@
                 <a:solidFill>
                   <a:srgbClr val="0F2040"/>
                 </a:solidFill>
-                <a:latin typeface="Calibri"/>
               </a:rPr>
               <a:t>Visualizar todos los módulos del sistema (sin modificar)</a:t>
             </a:r>
@@ -3816,7 +3603,6 @@
                 <a:solidFill>
                   <a:srgbClr val="666666"/>
                 </a:solidFill>
-                <a:latin typeface="Calibri"/>
               </a:rPr>
               <a:t>● </a:t>
             </a:r>
@@ -3825,7 +3611,6 @@
                 <a:solidFill>
                   <a:srgbClr val="0F2040"/>
                 </a:solidFill>
-                <a:latin typeface="Calibri"/>
               </a:rPr>
               <a:t>Revisar logs de auditoría (todas las acciones del sistema)</a:t>
             </a:r>
@@ -3844,7 +3629,6 @@
                 <a:solidFill>
                   <a:srgbClr val="666666"/>
                 </a:solidFill>
-                <a:latin typeface="Calibri"/>
               </a:rPr>
               <a:t>● </a:t>
             </a:r>
@@ -3853,9 +3637,8 @@
                 <a:solidFill>
                   <a:srgbClr val="0F2040"/>
                 </a:solidFill>
-                <a:latin typeface="Calibri"/>
               </a:rPr>
-              <a:t>Ver historial de aprobaciones de OT</a:t>
+              <a:t>Ver historial de aprobaciones de OT y SC</a:t>
             </a:r>
           </a:p>
           <a:p>
@@ -3872,7 +3655,6 @@
                 <a:solidFill>
                   <a:srgbClr val="666666"/>
                 </a:solidFill>
-                <a:latin typeface="Calibri"/>
               </a:rPr>
               <a:t>● </a:t>
             </a:r>
@@ -3881,9 +3663,8 @@
                 <a:solidFill>
                   <a:srgbClr val="0F2040"/>
                 </a:solidFill>
-                <a:latin typeface="Calibri"/>
               </a:rPr>
-              <a:t>Ver historial de aprobaciones de Solicitudes de Compra</a:t>
+              <a:t>Ver OT, proyectos, personal, activos, inventario</a:t>
             </a:r>
           </a:p>
           <a:p>
@@ -3900,7 +3681,6 @@
                 <a:solidFill>
                   <a:srgbClr val="666666"/>
                 </a:solidFill>
-                <a:latin typeface="Calibri"/>
               </a:rPr>
               <a:t>● </a:t>
             </a:r>
@@ -3909,9 +3689,8 @@
                 <a:solidFill>
                   <a:srgbClr val="0F2040"/>
                 </a:solidFill>
-                <a:latin typeface="Calibri"/>
               </a:rPr>
-              <a:t>Ver OT, proyectos, personal, activos, inventario</a:t>
+              <a:t>Ver reportes (no exportar)</a:t>
             </a:r>
           </a:p>
           <a:p>
@@ -3928,7 +3707,6 @@
                 <a:solidFill>
                   <a:srgbClr val="666666"/>
                 </a:solidFill>
-                <a:latin typeface="Calibri"/>
               </a:rPr>
               <a:t>● </a:t>
             </a:r>
@@ -3937,65 +3715,8 @@
                 <a:solidFill>
                   <a:srgbClr val="0F2040"/>
                 </a:solidFill>
-                <a:latin typeface="Calibri"/>
-              </a:rPr>
-              <a:t>Ver reportes (no exportar)</a:t>
-            </a:r>
-          </a:p>
-          <a:p>
-            <a:pPr algn="l">
-              <a:lnSpc>
-                <a:spcPct val="140000"/>
-              </a:lnSpc>
-              <a:spcAft>
-                <a:spcPts val="800"/>
-              </a:spcAft>
-            </a:pPr>
-            <a:r>
-              <a:rPr sz="1600" b="1">
-                <a:solidFill>
-                  <a:srgbClr val="666666"/>
-                </a:solidFill>
-                <a:latin typeface="Calibri"/>
-              </a:rPr>
-              <a:t>● </a:t>
-            </a:r>
-            <a:r>
-              <a:rPr sz="1600">
-                <a:solidFill>
-                  <a:srgbClr val="0F2040"/>
-                </a:solidFill>
-                <a:latin typeface="Calibri"/>
               </a:rPr>
               <a:t>Ver cumplimiento legal (solo lectura)</a:t>
-            </a:r>
-          </a:p>
-          <a:p>
-            <a:pPr algn="l">
-              <a:lnSpc>
-                <a:spcPct val="140000"/>
-              </a:lnSpc>
-              <a:spcAft>
-                <a:spcPts val="800"/>
-              </a:spcAft>
-            </a:pPr>
-            <a:r>
-              <a:rPr sz="1600" b="1">
-                <a:solidFill>
-                  <a:srgbClr val="666666"/>
-                </a:solidFill>
-                <a:latin typeface="Calibri"/>
-              </a:rPr>
-              <a:t>● </a:t>
-            </a:r>
-            <a:r>
-              <a:rPr sz="1600">
-                <a:solidFill>
-                  <a:srgbClr val="0F2040"/>
-                </a:solidFill>
-                <a:latin typeface="Calibri"/>
-              </a:rPr>
-              <a:t>Ver notificaciones del sistema</a:t>
             </a:r>
           </a:p>
         </p:txBody>
@@ -4214,7 +3935,7 @@
                 </a:solidFill>
                 <a:latin typeface="Calibri"/>
               </a:rPr>
-              <a:t>Módulos que puedes ver</a:t>
+              <a:t>Dashboard del Auditor</a:t>
             </a:r>
           </a:p>
         </p:txBody>
@@ -4254,16 +3975,40 @@
           </a:p>
         </p:txBody>
       </p:sp>
-      <p:sp>
-        <p:nvSpPr>
-          <p:cNvPr id="5" name="TextBox 4"/>
+      <p:pic>
+        <p:nvPicPr>
+          <p:cNvPr id="5" name="Picture 4" descr="02_dashboard.png"/>
+          <p:cNvPicPr>
+            <a:picLocks noChangeAspect="1"/>
+          </p:cNvPicPr>
+          <p:nvPr/>
+        </p:nvPicPr>
+        <p:blipFill>
+          <a:blip r:embed="rId2"/>
+          <a:stretch>
+            <a:fillRect/>
+          </a:stretch>
+        </p:blipFill>
+        <p:spPr>
+          <a:xfrm>
+            <a:off x="1386687" y="1097280"/>
+            <a:ext cx="9418320" cy="5886450"/>
+          </a:xfrm>
+          <a:prstGeom prst="rect">
+            <a:avLst/>
+          </a:prstGeom>
+        </p:spPr>
+      </p:pic>
+      <p:sp>
+        <p:nvSpPr>
+          <p:cNvPr id="6" name="TextBox 5"/>
           <p:cNvSpPr txBox="1"/>
           <p:nvPr/>
         </p:nvSpPr>
         <p:spPr>
           <a:xfrm>
-            <a:off x="457200" y="1005840"/>
-            <a:ext cx="11247120" cy="731520"/>
+            <a:off x="914400" y="6035040"/>
+            <a:ext cx="10332720" cy="457200"/>
           </a:xfrm>
           <a:prstGeom prst="rect">
             <a:avLst/>
@@ -4271,463 +4016,20 @@
           <a:noFill/>
         </p:spPr>
         <p:txBody>
-          <a:bodyPr wrap="square" anchor="t" lIns="45720" rIns="45720">
+          <a:bodyPr wrap="square" anchor="ctr" lIns="45720" rIns="45720">
             <a:spAutoFit/>
           </a:bodyPr>
           <a:lstStyle/>
           <a:p>
-            <a:pPr algn="l"/>
-            <a:r>
-              <a:rPr sz="1400" b="0">
+            <a:pPr algn="ctr"/>
+            <a:r>
+              <a:rPr sz="1200" b="0">
                 <a:solidFill>
                   <a:srgbClr val="666666"/>
                 </a:solidFill>
                 <a:latin typeface="Calibri"/>
               </a:rPr>
-              <a:t>Tienes acceso de lectura a casi todos los módulos:</a:t>
-            </a:r>
-          </a:p>
-        </p:txBody>
-      </p:sp>
-      <p:sp>
-        <p:nvSpPr>
-          <p:cNvPr id="6" name="TextBox 5"/>
-          <p:cNvSpPr txBox="1"/>
-          <p:nvPr/>
-        </p:nvSpPr>
-        <p:spPr>
-          <a:xfrm>
-            <a:off x="640080" y="1828800"/>
-            <a:ext cx="10972800" cy="4572000"/>
-          </a:xfrm>
-          <a:prstGeom prst="rect">
-            <a:avLst/>
-          </a:prstGeom>
-          <a:noFill/>
-        </p:spPr>
-        <p:txBody>
-          <a:bodyPr wrap="square">
-            <a:spAutoFit/>
-          </a:bodyPr>
-          <a:lstStyle/>
-          <a:p>
-            <a:pPr algn="l">
-              <a:lnSpc>
-                <a:spcPct val="140000"/>
-              </a:lnSpc>
-              <a:spcAft>
-                <a:spcPts val="800"/>
-              </a:spcAft>
-            </a:pPr>
-            <a:r>
-              <a:rPr sz="1600" b="1">
-                <a:solidFill>
-                  <a:srgbClr val="666666"/>
-                </a:solidFill>
-                <a:latin typeface="Calibri"/>
-              </a:rPr>
-              <a:t>● </a:t>
-            </a:r>
-            <a:r>
-              <a:rPr sz="1600">
-                <a:solidFill>
-                  <a:srgbClr val="0F2040"/>
-                </a:solidFill>
-                <a:latin typeface="Calibri"/>
-              </a:rPr>
-              <a:t>Dashboard</a:t>
-            </a:r>
-          </a:p>
-          <a:p>
-            <a:pPr algn="l">
-              <a:lnSpc>
-                <a:spcPct val="140000"/>
-              </a:lnSpc>
-              <a:spcAft>
-                <a:spcPts val="800"/>
-              </a:spcAft>
-            </a:pPr>
-            <a:r>
-              <a:rPr sz="1600" b="1">
-                <a:solidFill>
-                  <a:srgbClr val="666666"/>
-                </a:solidFill>
-                <a:latin typeface="Calibri"/>
-              </a:rPr>
-              <a:t>● </a:t>
-            </a:r>
-            <a:r>
-              <a:rPr sz="1600">
-                <a:solidFill>
-                  <a:srgbClr val="0F2040"/>
-                </a:solidFill>
-                <a:latin typeface="Calibri"/>
-              </a:rPr>
-              <a:t>Órdenes de Trabajo (ver, no crear/editar)</a:t>
-            </a:r>
-          </a:p>
-          <a:p>
-            <a:pPr algn="l">
-              <a:lnSpc>
-                <a:spcPct val="140000"/>
-              </a:lnSpc>
-              <a:spcAft>
-                <a:spcPts val="800"/>
-              </a:spcAft>
-            </a:pPr>
-            <a:r>
-              <a:rPr sz="1600" b="1">
-                <a:solidFill>
-                  <a:srgbClr val="666666"/>
-                </a:solidFill>
-                <a:latin typeface="Calibri"/>
-              </a:rPr>
-              <a:t>● </a:t>
-            </a:r>
-            <a:r>
-              <a:rPr sz="1600">
-                <a:solidFill>
-                  <a:srgbClr val="0F2040"/>
-                </a:solidFill>
-                <a:latin typeface="Calibri"/>
-              </a:rPr>
-              <a:t>Aprobaciones OT (ver historial)</a:t>
-            </a:r>
-          </a:p>
-          <a:p>
-            <a:pPr algn="l">
-              <a:lnSpc>
-                <a:spcPct val="140000"/>
-              </a:lnSpc>
-              <a:spcAft>
-                <a:spcPts val="800"/>
-              </a:spcAft>
-            </a:pPr>
-            <a:r>
-              <a:rPr sz="1600" b="1">
-                <a:solidFill>
-                  <a:srgbClr val="666666"/>
-                </a:solidFill>
-                <a:latin typeface="Calibri"/>
-              </a:rPr>
-              <a:t>● </a:t>
-            </a:r>
-            <a:r>
-              <a:rPr sz="1600">
-                <a:solidFill>
-                  <a:srgbClr val="0F2040"/>
-                </a:solidFill>
-                <a:latin typeface="Calibri"/>
-              </a:rPr>
-              <a:t>Proyectos (ver)</a:t>
-            </a:r>
-          </a:p>
-          <a:p>
-            <a:pPr algn="l">
-              <a:lnSpc>
-                <a:spcPct val="140000"/>
-              </a:lnSpc>
-              <a:spcAft>
-                <a:spcPts val="800"/>
-              </a:spcAft>
-            </a:pPr>
-            <a:r>
-              <a:rPr sz="1600" b="1">
-                <a:solidFill>
-                  <a:srgbClr val="666666"/>
-                </a:solidFill>
-                <a:latin typeface="Calibri"/>
-              </a:rPr>
-              <a:t>● </a:t>
-            </a:r>
-            <a:r>
-              <a:rPr sz="1600">
-                <a:solidFill>
-                  <a:srgbClr val="0F2040"/>
-                </a:solidFill>
-                <a:latin typeface="Calibri"/>
-              </a:rPr>
-              <a:t>Inspecciones (ver)</a:t>
-            </a:r>
-          </a:p>
-          <a:p>
-            <a:pPr algn="l">
-              <a:lnSpc>
-                <a:spcPct val="140000"/>
-              </a:lnSpc>
-              <a:spcAft>
-                <a:spcPts val="800"/>
-              </a:spcAft>
-            </a:pPr>
-            <a:r>
-              <a:rPr sz="1600" b="1">
-                <a:solidFill>
-                  <a:srgbClr val="666666"/>
-                </a:solidFill>
-                <a:latin typeface="Calibri"/>
-              </a:rPr>
-              <a:t>● </a:t>
-            </a:r>
-            <a:r>
-              <a:rPr sz="1600">
-                <a:solidFill>
-                  <a:srgbClr val="0F2040"/>
-                </a:solidFill>
-                <a:latin typeface="Calibri"/>
-              </a:rPr>
-              <a:t>Personal (ver)</a:t>
-            </a:r>
-          </a:p>
-          <a:p>
-            <a:pPr algn="l">
-              <a:lnSpc>
-                <a:spcPct val="140000"/>
-              </a:lnSpc>
-              <a:spcAft>
-                <a:spcPts val="800"/>
-              </a:spcAft>
-            </a:pPr>
-            <a:r>
-              <a:rPr sz="1600" b="1">
-                <a:solidFill>
-                  <a:srgbClr val="666666"/>
-                </a:solidFill>
-                <a:latin typeface="Calibri"/>
-              </a:rPr>
-              <a:t>● </a:t>
-            </a:r>
-            <a:r>
-              <a:rPr sz="1600">
-                <a:solidFill>
-                  <a:srgbClr val="0F2040"/>
-                </a:solidFill>
-                <a:latin typeface="Calibri"/>
-              </a:rPr>
-              <a:t>Activos (ver)</a:t>
-            </a:r>
-          </a:p>
-          <a:p>
-            <a:pPr algn="l">
-              <a:lnSpc>
-                <a:spcPct val="140000"/>
-              </a:lnSpc>
-              <a:spcAft>
-                <a:spcPts val="800"/>
-              </a:spcAft>
-            </a:pPr>
-            <a:r>
-              <a:rPr sz="1600" b="1">
-                <a:solidFill>
-                  <a:srgbClr val="666666"/>
-                </a:solidFill>
-                <a:latin typeface="Calibri"/>
-              </a:rPr>
-              <a:t>● </a:t>
-            </a:r>
-            <a:r>
-              <a:rPr sz="1600">
-                <a:solidFill>
-                  <a:srgbClr val="0F2040"/>
-                </a:solidFill>
-                <a:latin typeface="Calibri"/>
-              </a:rPr>
-              <a:t>Inventario (ver)</a:t>
-            </a:r>
-          </a:p>
-          <a:p>
-            <a:pPr algn="l">
-              <a:lnSpc>
-                <a:spcPct val="140000"/>
-              </a:lnSpc>
-              <a:spcAft>
-                <a:spcPts val="800"/>
-              </a:spcAft>
-            </a:pPr>
-            <a:r>
-              <a:rPr sz="1600" b="1">
-                <a:solidFill>
-                  <a:srgbClr val="666666"/>
-                </a:solidFill>
-                <a:latin typeface="Calibri"/>
-              </a:rPr>
-              <a:t>● </a:t>
-            </a:r>
-            <a:r>
-              <a:rPr sz="1600">
-                <a:solidFill>
-                  <a:srgbClr val="0F2040"/>
-                </a:solidFill>
-                <a:latin typeface="Calibri"/>
-              </a:rPr>
-              <a:t>Solicitud de Compras (ver todas)</a:t>
-            </a:r>
-          </a:p>
-          <a:p>
-            <a:pPr algn="l">
-              <a:lnSpc>
-                <a:spcPct val="140000"/>
-              </a:lnSpc>
-              <a:spcAft>
-                <a:spcPts val="800"/>
-              </a:spcAft>
-            </a:pPr>
-            <a:r>
-              <a:rPr sz="1600" b="1">
-                <a:solidFill>
-                  <a:srgbClr val="666666"/>
-                </a:solidFill>
-                <a:latin typeface="Calibri"/>
-              </a:rPr>
-              <a:t>● </a:t>
-            </a:r>
-            <a:r>
-              <a:rPr sz="1600">
-                <a:solidFill>
-                  <a:srgbClr val="0F2040"/>
-                </a:solidFill>
-                <a:latin typeface="Calibri"/>
-              </a:rPr>
-              <a:t>Proveedores (ver), Centro de Costos (ver)</a:t>
-            </a:r>
-          </a:p>
-          <a:p>
-            <a:pPr algn="l">
-              <a:lnSpc>
-                <a:spcPct val="140000"/>
-              </a:lnSpc>
-              <a:spcAft>
-                <a:spcPts val="800"/>
-              </a:spcAft>
-            </a:pPr>
-            <a:r>
-              <a:rPr sz="1600" b="1">
-                <a:solidFill>
-                  <a:srgbClr val="666666"/>
-                </a:solidFill>
-                <a:latin typeface="Calibri"/>
-              </a:rPr>
-              <a:t>● </a:t>
-            </a:r>
-            <a:r>
-              <a:rPr sz="1600">
-                <a:solidFill>
-                  <a:srgbClr val="0F2040"/>
-                </a:solidFill>
-                <a:latin typeface="Calibri"/>
-              </a:rPr>
-              <a:t>Catálogos (ver)</a:t>
-            </a:r>
-          </a:p>
-          <a:p>
-            <a:pPr algn="l">
-              <a:lnSpc>
-                <a:spcPct val="140000"/>
-              </a:lnSpc>
-              <a:spcAft>
-                <a:spcPts val="800"/>
-              </a:spcAft>
-            </a:pPr>
-            <a:r>
-              <a:rPr sz="1600" b="1">
-                <a:solidFill>
-                  <a:srgbClr val="666666"/>
-                </a:solidFill>
-                <a:latin typeface="Calibri"/>
-              </a:rPr>
-              <a:t>● </a:t>
-            </a:r>
-            <a:r>
-              <a:rPr sz="1600">
-                <a:solidFill>
-                  <a:srgbClr val="0F2040"/>
-                </a:solidFill>
-                <a:latin typeface="Calibri"/>
-              </a:rPr>
-              <a:t>Reportes (ver, no exportar)</a:t>
-            </a:r>
-          </a:p>
-          <a:p>
-            <a:pPr algn="l">
-              <a:lnSpc>
-                <a:spcPct val="140000"/>
-              </a:lnSpc>
-              <a:spcAft>
-                <a:spcPts val="800"/>
-              </a:spcAft>
-            </a:pPr>
-            <a:r>
-              <a:rPr sz="1600" b="1">
-                <a:solidFill>
-                  <a:srgbClr val="666666"/>
-                </a:solidFill>
-                <a:latin typeface="Calibri"/>
-              </a:rPr>
-              <a:t>● </a:t>
-            </a:r>
-            <a:r>
-              <a:rPr sz="1600">
-                <a:solidFill>
-                  <a:srgbClr val="0F2040"/>
-                </a:solidFill>
-                <a:latin typeface="Calibri"/>
-              </a:rPr>
-              <a:t>Auditoría / Logs (ver — módulo principal)</a:t>
-            </a:r>
-          </a:p>
-          <a:p>
-            <a:pPr algn="l">
-              <a:lnSpc>
-                <a:spcPct val="140000"/>
-              </a:lnSpc>
-              <a:spcAft>
-                <a:spcPts val="800"/>
-              </a:spcAft>
-            </a:pPr>
-            <a:r>
-              <a:rPr sz="1600" b="1">
-                <a:solidFill>
-                  <a:srgbClr val="666666"/>
-                </a:solidFill>
-                <a:latin typeface="Calibri"/>
-              </a:rPr>
-              <a:t>● </a:t>
-            </a:r>
-            <a:r>
-              <a:rPr sz="1600">
-                <a:solidFill>
-                  <a:srgbClr val="0F2040"/>
-                </a:solidFill>
-                <a:latin typeface="Calibri"/>
-              </a:rPr>
-              <a:t>Notificaciones</a:t>
-            </a:r>
-          </a:p>
-          <a:p>
-            <a:pPr algn="l">
-              <a:lnSpc>
-                <a:spcPct val="140000"/>
-              </a:lnSpc>
-              <a:spcAft>
-                <a:spcPts val="800"/>
-              </a:spcAft>
-            </a:pPr>
-            <a:r>
-              <a:rPr sz="1600" b="1">
-                <a:solidFill>
-                  <a:srgbClr val="666666"/>
-                </a:solidFill>
-                <a:latin typeface="Calibri"/>
-              </a:rPr>
-              <a:t>● </a:t>
-            </a:r>
-            <a:r>
-              <a:rPr sz="1600">
-                <a:solidFill>
-                  <a:srgbClr val="0F2040"/>
-                </a:solidFill>
-                <a:latin typeface="Calibri"/>
-              </a:rPr>
-              <a:t>Rondas (ver registros, no registrar)</a:t>
+              <a:t>Vista del Dashboard — el auditor ve todas las métricas</a:t>
             </a:r>
           </a:p>
         </p:txBody>
@@ -4860,7 +4162,7 @@
     <p:bg>
       <p:bgPr>
         <a:solidFill>
-          <a:srgbClr val="0F2040"/>
+          <a:srgbClr val="FFFFFF"/>
         </a:solidFill>
         <a:effectLst/>
       </p:bgPr>
@@ -4880,14 +4182,14 @@
         </p:nvSpPr>
         <p:spPr>
           <a:xfrm>
-            <a:off x="0" y="3108960"/>
-            <a:ext cx="12191695" cy="73152"/>
+            <a:off x="0" y="0"/>
+            <a:ext cx="12191695" cy="822960"/>
           </a:xfrm>
           <a:prstGeom prst="rect">
             <a:avLst/>
           </a:prstGeom>
           <a:solidFill>
-            <a:srgbClr val="666666"/>
+            <a:srgbClr val="0A1172"/>
           </a:solidFill>
           <a:ln>
             <a:noFill/>
@@ -4924,8 +4226,8 @@
         </p:nvSpPr>
         <p:spPr>
           <a:xfrm>
-            <a:off x="731520" y="2560320"/>
-            <a:ext cx="10698480" cy="640080"/>
+            <a:off x="365760" y="137160"/>
+            <a:ext cx="10058400" cy="548640"/>
           </a:xfrm>
           <a:prstGeom prst="rect">
             <a:avLst/>
@@ -4938,22 +4240,116 @@
           </a:bodyPr>
           <a:lstStyle/>
           <a:p>
-            <a:pPr algn="ctr"/>
-            <a:r>
-              <a:rPr sz="3600" b="1">
+            <a:pPr algn="l"/>
+            <a:r>
+              <a:rPr sz="2200" b="1">
                 <a:solidFill>
                   <a:srgbClr val="FFFFFF"/>
                 </a:solidFill>
                 <a:latin typeface="Calibri"/>
               </a:rPr>
-              <a:t>Tu enfoque principal</a:t>
-            </a:r>
-          </a:p>
-        </p:txBody>
-      </p:sp>
-      <p:sp>
-        <p:nvSpPr>
-          <p:cNvPr id="4" name="Rectangle 3"/>
+              <a:t>Solicitudes de Compra</a:t>
+            </a:r>
+          </a:p>
+        </p:txBody>
+      </p:sp>
+      <p:sp>
+        <p:nvSpPr>
+          <p:cNvPr id="4" name="TextBox 3"/>
+          <p:cNvSpPr txBox="1"/>
+          <p:nvPr/>
+        </p:nvSpPr>
+        <p:spPr>
+          <a:xfrm>
+            <a:off x="11247120" y="137160"/>
+            <a:ext cx="731520" cy="548640"/>
+          </a:xfrm>
+          <a:prstGeom prst="rect">
+            <a:avLst/>
+          </a:prstGeom>
+          <a:noFill/>
+        </p:spPr>
+        <p:txBody>
+          <a:bodyPr wrap="square" anchor="ctr" lIns="45720" rIns="45720">
+            <a:spAutoFit/>
+          </a:bodyPr>
+          <a:lstStyle/>
+          <a:p>
+            <a:pPr algn="r"/>
+            <a:r>
+              <a:rPr sz="1400" b="0">
+                <a:solidFill>
+                  <a:srgbClr val="F59E0B"/>
+                </a:solidFill>
+                <a:latin typeface="Calibri"/>
+              </a:rPr>
+              <a:t>4</a:t>
+            </a:r>
+          </a:p>
+        </p:txBody>
+      </p:sp>
+      <p:pic>
+        <p:nvPicPr>
+          <p:cNvPr id="5" name="Picture 4" descr="06_solicitudes_compra.png"/>
+          <p:cNvPicPr>
+            <a:picLocks noChangeAspect="1"/>
+          </p:cNvPicPr>
+          <p:nvPr/>
+        </p:nvPicPr>
+        <p:blipFill>
+          <a:blip r:embed="rId2"/>
+          <a:stretch>
+            <a:fillRect/>
+          </a:stretch>
+        </p:blipFill>
+        <p:spPr>
+          <a:xfrm>
+            <a:off x="1386687" y="1097280"/>
+            <a:ext cx="9418320" cy="5886450"/>
+          </a:xfrm>
+          <a:prstGeom prst="rect">
+            <a:avLst/>
+          </a:prstGeom>
+        </p:spPr>
+      </p:pic>
+      <p:sp>
+        <p:nvSpPr>
+          <p:cNvPr id="6" name="TextBox 5"/>
+          <p:cNvSpPr txBox="1"/>
+          <p:nvPr/>
+        </p:nvSpPr>
+        <p:spPr>
+          <a:xfrm>
+            <a:off x="914400" y="6035040"/>
+            <a:ext cx="10332720" cy="457200"/>
+          </a:xfrm>
+          <a:prstGeom prst="rect">
+            <a:avLst/>
+          </a:prstGeom>
+          <a:noFill/>
+        </p:spPr>
+        <p:txBody>
+          <a:bodyPr wrap="square" anchor="ctr" lIns="45720" rIns="45720">
+            <a:spAutoFit/>
+          </a:bodyPr>
+          <a:lstStyle/>
+          <a:p>
+            <a:pPr algn="ctr"/>
+            <a:r>
+              <a:rPr sz="1200" b="0">
+                <a:solidFill>
+                  <a:srgbClr val="666666"/>
+                </a:solidFill>
+                <a:latin typeface="Calibri"/>
+              </a:rPr>
+              <a:t>SC — el auditor ve todas pero no puede aprobar ni crear</a:t>
+            </a:r>
+          </a:p>
+        </p:txBody>
+      </p:sp>
+      <p:sp>
+        <p:nvSpPr>
+          <p:cNvPr id="7" name="Rectangle 6"/>
           <p:cNvSpPr/>
           <p:nvPr/>
         </p:nvSpPr>
@@ -4997,7 +4393,7 @@
       </p:sp>
       <p:sp>
         <p:nvSpPr>
-          <p:cNvPr id="5" name="TextBox 4"/>
+          <p:cNvPr id="8" name="TextBox 7"/>
           <p:cNvSpPr txBox="1"/>
           <p:nvPr/>
         </p:nvSpPr>
@@ -5032,7 +4428,7 @@
       </p:sp>
       <p:sp>
         <p:nvSpPr>
-          <p:cNvPr id="6" name="TextBox 5"/>
+          <p:cNvPr id="9" name="TextBox 8"/>
           <p:cNvSpPr txBox="1"/>
           <p:nvPr/>
         </p:nvSpPr>
@@ -5165,7 +4561,7 @@
                 </a:solidFill>
                 <a:latin typeface="Calibri"/>
               </a:rPr>
-              <a:t>Módulo Auditoría (Logs)</a:t>
+              <a:t>Órdenes de Trabajo</a:t>
             </a:r>
           </a:p>
         </p:txBody>
@@ -5205,16 +4601,40 @@
           </a:p>
         </p:txBody>
       </p:sp>
-      <p:sp>
-        <p:nvSpPr>
-          <p:cNvPr id="5" name="TextBox 4"/>
+      <p:pic>
+        <p:nvPicPr>
+          <p:cNvPr id="5" name="Picture 4" descr="03_ot_listado.png"/>
+          <p:cNvPicPr>
+            <a:picLocks noChangeAspect="1"/>
+          </p:cNvPicPr>
+          <p:nvPr/>
+        </p:nvPicPr>
+        <p:blipFill>
+          <a:blip r:embed="rId2"/>
+          <a:stretch>
+            <a:fillRect/>
+          </a:stretch>
+        </p:blipFill>
+        <p:spPr>
+          <a:xfrm>
+            <a:off x="1386687" y="1097280"/>
+            <a:ext cx="9418320" cy="5886450"/>
+          </a:xfrm>
+          <a:prstGeom prst="rect">
+            <a:avLst/>
+          </a:prstGeom>
+        </p:spPr>
+      </p:pic>
+      <p:sp>
+        <p:nvSpPr>
+          <p:cNvPr id="6" name="TextBox 5"/>
           <p:cNvSpPr txBox="1"/>
           <p:nvPr/>
         </p:nvSpPr>
         <p:spPr>
           <a:xfrm>
-            <a:off x="457200" y="1005840"/>
-            <a:ext cx="11247120" cy="731520"/>
+            <a:off x="914400" y="6035040"/>
+            <a:ext cx="10332720" cy="457200"/>
           </a:xfrm>
           <a:prstGeom prst="rect">
             <a:avLst/>
@@ -5222,239 +4642,20 @@
           <a:noFill/>
         </p:spPr>
         <p:txBody>
-          <a:bodyPr wrap="square" anchor="t" lIns="45720" rIns="45720">
+          <a:bodyPr wrap="square" anchor="ctr" lIns="45720" rIns="45720">
             <a:spAutoFit/>
           </a:bodyPr>
           <a:lstStyle/>
           <a:p>
-            <a:pPr algn="l"/>
-            <a:r>
-              <a:rPr sz="1400" b="0">
+            <a:pPr algn="ctr"/>
+            <a:r>
+              <a:rPr sz="1200" b="0">
                 <a:solidFill>
                   <a:srgbClr val="666666"/>
                 </a:solidFill>
                 <a:latin typeface="Calibri"/>
               </a:rPr>
-              <a:t>Tu herramienta principal para verificar el uso del sistema:</a:t>
-            </a:r>
-          </a:p>
-        </p:txBody>
-      </p:sp>
-      <p:sp>
-        <p:nvSpPr>
-          <p:cNvPr id="6" name="TextBox 5"/>
-          <p:cNvSpPr txBox="1"/>
-          <p:nvPr/>
-        </p:nvSpPr>
-        <p:spPr>
-          <a:xfrm>
-            <a:off x="640080" y="1828800"/>
-            <a:ext cx="10972800" cy="4572000"/>
-          </a:xfrm>
-          <a:prstGeom prst="rect">
-            <a:avLst/>
-          </a:prstGeom>
-          <a:noFill/>
-        </p:spPr>
-        <p:txBody>
-          <a:bodyPr wrap="square">
-            <a:spAutoFit/>
-          </a:bodyPr>
-          <a:lstStyle/>
-          <a:p>
-            <a:pPr algn="l">
-              <a:lnSpc>
-                <a:spcPct val="140000"/>
-              </a:lnSpc>
-              <a:spcAft>
-                <a:spcPts val="800"/>
-              </a:spcAft>
-            </a:pPr>
-            <a:r>
-              <a:rPr sz="1600" b="1">
-                <a:solidFill>
-                  <a:srgbClr val="666666"/>
-                </a:solidFill>
-                <a:latin typeface="Calibri"/>
-              </a:rPr>
-              <a:t>● </a:t>
-            </a:r>
-            <a:r>
-              <a:rPr sz="1600">
-                <a:solidFill>
-                  <a:srgbClr val="0F2040"/>
-                </a:solidFill>
-                <a:latin typeface="Calibri"/>
-              </a:rPr>
-              <a:t>Todas las acciones quedan registradas: create, update, delete, login, etc.</a:t>
-            </a:r>
-          </a:p>
-          <a:p>
-            <a:pPr algn="l">
-              <a:lnSpc>
-                <a:spcPct val="140000"/>
-              </a:lnSpc>
-              <a:spcAft>
-                <a:spcPts val="800"/>
-              </a:spcAft>
-            </a:pPr>
-            <a:r>
-              <a:rPr sz="1600" b="1">
-                <a:solidFill>
-                  <a:srgbClr val="666666"/>
-                </a:solidFill>
-                <a:latin typeface="Calibri"/>
-              </a:rPr>
-              <a:t>● </a:t>
-            </a:r>
-            <a:r>
-              <a:rPr sz="1600">
-                <a:solidFill>
-                  <a:srgbClr val="0F2040"/>
-                </a:solidFill>
-                <a:latin typeface="Calibri"/>
-              </a:rPr>
-              <a:t>Cada registro incluye: usuario, entidad, ID, datos antes/después, IP, fecha</a:t>
-            </a:r>
-          </a:p>
-          <a:p>
-            <a:pPr algn="l">
-              <a:lnSpc>
-                <a:spcPct val="140000"/>
-              </a:lnSpc>
-              <a:spcAft>
-                <a:spcPts val="800"/>
-              </a:spcAft>
-            </a:pPr>
-            <a:r>
-              <a:rPr sz="1600" b="1">
-                <a:solidFill>
-                  <a:srgbClr val="666666"/>
-                </a:solidFill>
-                <a:latin typeface="Calibri"/>
-              </a:rPr>
-              <a:t>● </a:t>
-            </a:r>
-            <a:r>
-              <a:rPr sz="1600">
-                <a:solidFill>
-                  <a:srgbClr val="0F2040"/>
-                </a:solidFill>
-                <a:latin typeface="Calibri"/>
-              </a:rPr>
-              <a:t>Puedes filtrar por usuario, entidad, acción o rango de fechas</a:t>
-            </a:r>
-          </a:p>
-          <a:p>
-            <a:pPr algn="l">
-              <a:lnSpc>
-                <a:spcPct val="140000"/>
-              </a:lnSpc>
-              <a:spcAft>
-                <a:spcPts val="800"/>
-              </a:spcAft>
-            </a:pPr>
-            <a:r>
-              <a:rPr sz="1600" b="1">
-                <a:solidFill>
-                  <a:srgbClr val="666666"/>
-                </a:solidFill>
-                <a:latin typeface="Calibri"/>
-              </a:rPr>
-              <a:t>● </a:t>
-            </a:r>
-            <a:r>
-              <a:rPr sz="1600">
-                <a:solidFill>
-                  <a:srgbClr val="0F2040"/>
-                </a:solidFill>
-                <a:latin typeface="Calibri"/>
-              </a:rPr>
-              <a:t>Verifica quién aprobó/rechazó cada OT y SC</a:t>
-            </a:r>
-          </a:p>
-          <a:p>
-            <a:pPr algn="l">
-              <a:lnSpc>
-                <a:spcPct val="140000"/>
-              </a:lnSpc>
-              <a:spcAft>
-                <a:spcPts val="800"/>
-              </a:spcAft>
-            </a:pPr>
-            <a:r>
-              <a:rPr sz="1600" b="1">
-                <a:solidFill>
-                  <a:srgbClr val="666666"/>
-                </a:solidFill>
-                <a:latin typeface="Calibri"/>
-              </a:rPr>
-              <a:t>● </a:t>
-            </a:r>
-            <a:r>
-              <a:rPr sz="1600">
-                <a:solidFill>
-                  <a:srgbClr val="0F2040"/>
-                </a:solidFill>
-                <a:latin typeface="Calibri"/>
-              </a:rPr>
-              <a:t>Verifica quién creó/modificó usuarios y permisos</a:t>
-            </a:r>
-          </a:p>
-          <a:p>
-            <a:pPr algn="l">
-              <a:lnSpc>
-                <a:spcPct val="140000"/>
-              </a:lnSpc>
-              <a:spcAft>
-                <a:spcPts val="800"/>
-              </a:spcAft>
-            </a:pPr>
-            <a:r>
-              <a:rPr sz="1600" b="1">
-                <a:solidFill>
-                  <a:srgbClr val="666666"/>
-                </a:solidFill>
-                <a:latin typeface="Calibri"/>
-              </a:rPr>
-              <a:t>● </a:t>
-            </a:r>
-            <a:r>
-              <a:rPr sz="1600">
-                <a:solidFill>
-                  <a:srgbClr val="0F2040"/>
-                </a:solidFill>
-                <a:latin typeface="Calibri"/>
-              </a:rPr>
-              <a:t>Verifica intentos de login fallidos y bloqueos de cuenta</a:t>
-            </a:r>
-          </a:p>
-          <a:p>
-            <a:pPr algn="l">
-              <a:lnSpc>
-                <a:spcPct val="140000"/>
-              </a:lnSpc>
-              <a:spcAft>
-                <a:spcPts val="800"/>
-              </a:spcAft>
-            </a:pPr>
-            <a:r>
-              <a:rPr sz="1600" b="1">
-                <a:solidFill>
-                  <a:srgbClr val="666666"/>
-                </a:solidFill>
-                <a:latin typeface="Calibri"/>
-              </a:rPr>
-              <a:t>● </a:t>
-            </a:r>
-            <a:r>
-              <a:rPr sz="1600">
-                <a:solidFill>
-                  <a:srgbClr val="0F2040"/>
-                </a:solidFill>
-                <a:latin typeface="Calibri"/>
-              </a:rPr>
-              <a:t>Trazabilidad completa de cambios en datos sensibles</a:t>
+              <a:t>OT — el auditor ve todas para verificar el cumplimiento de procesos</a:t>
             </a:r>
           </a:p>
         </p:txBody>
@@ -5673,7 +4874,7 @@
                 </a:solidFill>
                 <a:latin typeface="Calibri"/>
               </a:rPr>
-              <a:t>Qué revisar en una auditoría</a:t>
+              <a:t>Proyectos</a:t>
             </a:r>
           </a:p>
         </p:txBody>
@@ -5713,22 +4914,81 @@
           </a:p>
         </p:txBody>
       </p:sp>
-      <p:sp>
-        <p:nvSpPr>
-          <p:cNvPr id="5" name="Rounded Rectangle 4"/>
+      <p:pic>
+        <p:nvPicPr>
+          <p:cNvPr id="5" name="Picture 4" descr="04_proyectos.png"/>
+          <p:cNvPicPr>
+            <a:picLocks noChangeAspect="1"/>
+          </p:cNvPicPr>
+          <p:nvPr/>
+        </p:nvPicPr>
+        <p:blipFill>
+          <a:blip r:embed="rId2"/>
+          <a:stretch>
+            <a:fillRect/>
+          </a:stretch>
+        </p:blipFill>
+        <p:spPr>
+          <a:xfrm>
+            <a:off x="1386687" y="1097280"/>
+            <a:ext cx="9418320" cy="5886450"/>
+          </a:xfrm>
+          <a:prstGeom prst="rect">
+            <a:avLst/>
+          </a:prstGeom>
+        </p:spPr>
+      </p:pic>
+      <p:sp>
+        <p:nvSpPr>
+          <p:cNvPr id="6" name="TextBox 5"/>
+          <p:cNvSpPr txBox="1"/>
+          <p:nvPr/>
+        </p:nvSpPr>
+        <p:spPr>
+          <a:xfrm>
+            <a:off x="914400" y="6035040"/>
+            <a:ext cx="10332720" cy="457200"/>
+          </a:xfrm>
+          <a:prstGeom prst="rect">
+            <a:avLst/>
+          </a:prstGeom>
+          <a:noFill/>
+        </p:spPr>
+        <p:txBody>
+          <a:bodyPr wrap="square" anchor="ctr" lIns="45720" rIns="45720">
+            <a:spAutoFit/>
+          </a:bodyPr>
+          <a:lstStyle/>
+          <a:p>
+            <a:pPr algn="ctr"/>
+            <a:r>
+              <a:rPr sz="1200" b="0">
+                <a:solidFill>
+                  <a:srgbClr val="666666"/>
+                </a:solidFill>
+                <a:latin typeface="Calibri"/>
+              </a:rPr>
+              <a:t>Proyectos — el auditor puede ver todos los proyectos</a:t>
+            </a:r>
+          </a:p>
+        </p:txBody>
+      </p:sp>
+      <p:sp>
+        <p:nvSpPr>
+          <p:cNvPr id="7" name="Rectangle 6"/>
           <p:cNvSpPr/>
           <p:nvPr/>
         </p:nvSpPr>
         <p:spPr>
           <a:xfrm>
-            <a:off x="365760" y="1097280"/>
-            <a:ext cx="5577840" cy="548640"/>
-          </a:xfrm>
-          <a:prstGeom prst="roundRect">
+            <a:off x="0" y="6583680"/>
+            <a:ext cx="12191695" cy="274320"/>
+          </a:xfrm>
+          <a:prstGeom prst="rect">
             <a:avLst/>
           </a:prstGeom>
           <a:solidFill>
-            <a:srgbClr val="666666"/>
+            <a:srgbClr val="0F2040"/>
           </a:solidFill>
           <a:ln>
             <a:noFill/>
@@ -5759,14 +5019,14 @@
       </p:sp>
       <p:sp>
         <p:nvSpPr>
-          <p:cNvPr id="6" name="TextBox 5"/>
+          <p:cNvPr id="8" name="TextBox 7"/>
           <p:cNvSpPr txBox="1"/>
           <p:nvPr/>
         </p:nvSpPr>
         <p:spPr>
           <a:xfrm>
-            <a:off x="365760" y="1097280"/>
-            <a:ext cx="5577840" cy="548640"/>
+            <a:off x="365760" y="6583680"/>
+            <a:ext cx="6400800" cy="274320"/>
           </a:xfrm>
           <a:prstGeom prst="rect">
             <a:avLst/>
@@ -5779,490 +5039,6 @@
           </a:bodyPr>
           <a:lstStyle/>
           <a:p>
-            <a:pPr algn="ctr"/>
-            <a:r>
-              <a:rPr sz="1800" b="1">
-                <a:solidFill>
-                  <a:srgbClr val="FFFFFF"/>
-                </a:solidFill>
-                <a:latin typeface="Calibri"/>
-              </a:rPr>
-              <a:t>Verificar cumplimiento de procesos:</a:t>
-            </a:r>
-          </a:p>
-        </p:txBody>
-      </p:sp>
-      <p:sp>
-        <p:nvSpPr>
-          <p:cNvPr id="7" name="TextBox 6"/>
-          <p:cNvSpPr txBox="1"/>
-          <p:nvPr/>
-        </p:nvSpPr>
-        <p:spPr>
-          <a:xfrm>
-            <a:off x="457200" y="1828800"/>
-            <a:ext cx="5394960" cy="4572000"/>
-          </a:xfrm>
-          <a:prstGeom prst="rect">
-            <a:avLst/>
-          </a:prstGeom>
-          <a:noFill/>
-        </p:spPr>
-        <p:txBody>
-          <a:bodyPr wrap="square">
-            <a:spAutoFit/>
-          </a:bodyPr>
-          <a:lstStyle/>
-          <a:p>
-            <a:pPr algn="l">
-              <a:lnSpc>
-                <a:spcPct val="140000"/>
-              </a:lnSpc>
-              <a:spcAft>
-                <a:spcPts val="800"/>
-              </a:spcAft>
-            </a:pPr>
-            <a:r>
-              <a:rPr sz="1400" b="1">
-                <a:solidFill>
-                  <a:srgbClr val="666666"/>
-                </a:solidFill>
-                <a:latin typeface="Calibri"/>
-              </a:rPr>
-              <a:t>● </a:t>
-            </a:r>
-            <a:r>
-              <a:rPr sz="1400">
-                <a:solidFill>
-                  <a:srgbClr val="0F2040"/>
-                </a:solidFill>
-                <a:latin typeface="Calibri"/>
-              </a:rPr>
-              <a:t>¿Las OT fueron aprobadas por roles autorizados?</a:t>
-            </a:r>
-          </a:p>
-          <a:p>
-            <a:pPr algn="l">
-              <a:lnSpc>
-                <a:spcPct val="140000"/>
-              </a:lnSpc>
-              <a:spcAft>
-                <a:spcPts val="800"/>
-              </a:spcAft>
-            </a:pPr>
-            <a:r>
-              <a:rPr sz="1400" b="1">
-                <a:solidFill>
-                  <a:srgbClr val="666666"/>
-                </a:solidFill>
-                <a:latin typeface="Calibri"/>
-              </a:rPr>
-              <a:t>● </a:t>
-            </a:r>
-            <a:r>
-              <a:rPr sz="1400">
-                <a:solidFill>
-                  <a:srgbClr val="0F2040"/>
-                </a:solidFill>
-                <a:latin typeface="Calibri"/>
-              </a:rPr>
-              <a:t>¿Las SC siguen el flujo supervisor → admin?</a:t>
-            </a:r>
-          </a:p>
-          <a:p>
-            <a:pPr algn="l">
-              <a:lnSpc>
-                <a:spcPct val="140000"/>
-              </a:lnSpc>
-              <a:spcAft>
-                <a:spcPts val="800"/>
-              </a:spcAft>
-            </a:pPr>
-            <a:r>
-              <a:rPr sz="1400" b="1">
-                <a:solidFill>
-                  <a:srgbClr val="666666"/>
-                </a:solidFill>
-                <a:latin typeface="Calibri"/>
-              </a:rPr>
-              <a:t>● </a:t>
-            </a:r>
-            <a:r>
-              <a:rPr sz="1400">
-                <a:solidFill>
-                  <a:srgbClr val="0F2040"/>
-                </a:solidFill>
-                <a:latin typeface="Calibri"/>
-              </a:rPr>
-              <a:t>¿Los usuarios cambian su contraseña temporal?</a:t>
-            </a:r>
-          </a:p>
-          <a:p>
-            <a:pPr algn="l">
-              <a:lnSpc>
-                <a:spcPct val="140000"/>
-              </a:lnSpc>
-              <a:spcAft>
-                <a:spcPts val="800"/>
-              </a:spcAft>
-            </a:pPr>
-            <a:r>
-              <a:rPr sz="1400" b="1">
-                <a:solidFill>
-                  <a:srgbClr val="666666"/>
-                </a:solidFill>
-                <a:latin typeface="Calibri"/>
-              </a:rPr>
-              <a:t>● </a:t>
-            </a:r>
-            <a:r>
-              <a:rPr sz="1400">
-                <a:solidFill>
-                  <a:srgbClr val="0F2040"/>
-                </a:solidFill>
-                <a:latin typeface="Calibri"/>
-              </a:rPr>
-              <a:t>¿Se hacen respaldos periódicos?</a:t>
-            </a:r>
-          </a:p>
-          <a:p>
-            <a:pPr algn="l">
-              <a:lnSpc>
-                <a:spcPct val="140000"/>
-              </a:lnSpc>
-              <a:spcAft>
-                <a:spcPts val="800"/>
-              </a:spcAft>
-            </a:pPr>
-            <a:r>
-              <a:rPr sz="1400" b="1">
-                <a:solidFill>
-                  <a:srgbClr val="666666"/>
-                </a:solidFill>
-                <a:latin typeface="Calibri"/>
-              </a:rPr>
-              <a:t>● </a:t>
-            </a:r>
-            <a:r>
-              <a:rPr sz="1400">
-                <a:solidFill>
-                  <a:srgbClr val="0F2040"/>
-                </a:solidFill>
-                <a:latin typeface="Calibri"/>
-              </a:rPr>
-              <a:t>¿Hay intentos de login sospechosos?</a:t>
-            </a:r>
-          </a:p>
-        </p:txBody>
-      </p:sp>
-      <p:sp>
-        <p:nvSpPr>
-          <p:cNvPr id="8" name="Rounded Rectangle 7"/>
-          <p:cNvSpPr/>
-          <p:nvPr/>
-        </p:nvSpPr>
-        <p:spPr>
-          <a:xfrm>
-            <a:off x="6217920" y="1097280"/>
-            <a:ext cx="5577840" cy="548640"/>
-          </a:xfrm>
-          <a:prstGeom prst="roundRect">
-            <a:avLst/>
-          </a:prstGeom>
-          <a:solidFill>
-            <a:srgbClr val="0A1172"/>
-          </a:solidFill>
-          <a:ln>
-            <a:noFill/>
-          </a:ln>
-          <a:effectLst/>
-        </p:spPr>
-        <p:style>
-          <a:lnRef idx="1">
-            <a:schemeClr val="accent1"/>
-          </a:lnRef>
-          <a:fillRef idx="3">
-            <a:schemeClr val="accent1"/>
-          </a:fillRef>
-          <a:effectRef idx="2">
-            <a:schemeClr val="accent1"/>
-          </a:effectRef>
-          <a:fontRef idx="minor">
-            <a:schemeClr val="lt1"/>
-          </a:fontRef>
-        </p:style>
-        <p:txBody>
-          <a:bodyPr rtlCol="0" anchor="ctr"/>
-          <a:lstStyle/>
-          <a:p>
-            <a:pPr algn="ctr"/>
-          </a:p>
-        </p:txBody>
-      </p:sp>
-      <p:sp>
-        <p:nvSpPr>
-          <p:cNvPr id="9" name="TextBox 8"/>
-          <p:cNvSpPr txBox="1"/>
-          <p:nvPr/>
-        </p:nvSpPr>
-        <p:spPr>
-          <a:xfrm>
-            <a:off x="6217920" y="1097280"/>
-            <a:ext cx="5577840" cy="548640"/>
-          </a:xfrm>
-          <a:prstGeom prst="rect">
-            <a:avLst/>
-          </a:prstGeom>
-          <a:noFill/>
-        </p:spPr>
-        <p:txBody>
-          <a:bodyPr wrap="square" anchor="ctr" lIns="45720" rIns="45720">
-            <a:spAutoFit/>
-          </a:bodyPr>
-          <a:lstStyle/>
-          <a:p>
-            <a:pPr algn="ctr"/>
-            <a:r>
-              <a:rPr sz="1800" b="1">
-                <a:solidFill>
-                  <a:srgbClr val="FFFFFF"/>
-                </a:solidFill>
-                <a:latin typeface="Calibri"/>
-              </a:rPr>
-              <a:t>Verificar consistencia de datos:</a:t>
-            </a:r>
-          </a:p>
-        </p:txBody>
-      </p:sp>
-      <p:sp>
-        <p:nvSpPr>
-          <p:cNvPr id="10" name="TextBox 9"/>
-          <p:cNvSpPr txBox="1"/>
-          <p:nvPr/>
-        </p:nvSpPr>
-        <p:spPr>
-          <a:xfrm>
-            <a:off x="6309360" y="1828800"/>
-            <a:ext cx="5394960" cy="4572000"/>
-          </a:xfrm>
-          <a:prstGeom prst="rect">
-            <a:avLst/>
-          </a:prstGeom>
-          <a:noFill/>
-        </p:spPr>
-        <p:txBody>
-          <a:bodyPr wrap="square">
-            <a:spAutoFit/>
-          </a:bodyPr>
-          <a:lstStyle/>
-          <a:p>
-            <a:pPr algn="l">
-              <a:lnSpc>
-                <a:spcPct val="140000"/>
-              </a:lnSpc>
-              <a:spcAft>
-                <a:spcPts val="800"/>
-              </a:spcAft>
-            </a:pPr>
-            <a:r>
-              <a:rPr sz="1400" b="1">
-                <a:solidFill>
-                  <a:srgbClr val="0A1172"/>
-                </a:solidFill>
-                <a:latin typeface="Calibri"/>
-              </a:rPr>
-              <a:t>● </a:t>
-            </a:r>
-            <a:r>
-              <a:rPr sz="1400">
-                <a:solidFill>
-                  <a:srgbClr val="0F2040"/>
-                </a:solidFill>
-                <a:latin typeface="Calibri"/>
-              </a:rPr>
-              <a:t>¿Los montos de OT coinciden con materiales+personal?</a:t>
-            </a:r>
-          </a:p>
-          <a:p>
-            <a:pPr algn="l">
-              <a:lnSpc>
-                <a:spcPct val="140000"/>
-              </a:lnSpc>
-              <a:spcAft>
-                <a:spcPts val="800"/>
-              </a:spcAft>
-            </a:pPr>
-            <a:r>
-              <a:rPr sz="1400" b="1">
-                <a:solidFill>
-                  <a:srgbClr val="0A1172"/>
-                </a:solidFill>
-                <a:latin typeface="Calibri"/>
-              </a:rPr>
-              <a:t>● </a:t>
-            </a:r>
-            <a:r>
-              <a:rPr sz="1400">
-                <a:solidFill>
-                  <a:srgbClr val="0F2040"/>
-                </a:solidFill>
-                <a:latin typeface="Calibri"/>
-              </a:rPr>
-              <a:t>¿Las SC aprobadas tienen observaciones?</a:t>
-            </a:r>
-          </a:p>
-          <a:p>
-            <a:pPr algn="l">
-              <a:lnSpc>
-                <a:spcPct val="140000"/>
-              </a:lnSpc>
-              <a:spcAft>
-                <a:spcPts val="800"/>
-              </a:spcAft>
-            </a:pPr>
-            <a:r>
-              <a:rPr sz="1400" b="1">
-                <a:solidFill>
-                  <a:srgbClr val="0A1172"/>
-                </a:solidFill>
-                <a:latin typeface="Calibri"/>
-              </a:rPr>
-              <a:t>● </a:t>
-            </a:r>
-            <a:r>
-              <a:rPr sz="1400">
-                <a:solidFill>
-                  <a:srgbClr val="0F2040"/>
-                </a:solidFill>
-                <a:latin typeface="Calibri"/>
-              </a:rPr>
-              <a:t>¿Los proyectos completados tienen fecha de fin real?</a:t>
-            </a:r>
-          </a:p>
-          <a:p>
-            <a:pPr algn="l">
-              <a:lnSpc>
-                <a:spcPct val="140000"/>
-              </a:lnSpc>
-              <a:spcAft>
-                <a:spcPts val="800"/>
-              </a:spcAft>
-            </a:pPr>
-            <a:r>
-              <a:rPr sz="1400" b="1">
-                <a:solidFill>
-                  <a:srgbClr val="0A1172"/>
-                </a:solidFill>
-                <a:latin typeface="Calibri"/>
-              </a:rPr>
-              <a:t>● </a:t>
-            </a:r>
-            <a:r>
-              <a:rPr sz="1400">
-                <a:solidFill>
-                  <a:srgbClr val="0F2040"/>
-                </a:solidFill>
-                <a:latin typeface="Calibri"/>
-              </a:rPr>
-              <a:t>¿Las rondas se registran en horarios esperados?</a:t>
-            </a:r>
-          </a:p>
-          <a:p>
-            <a:pPr algn="l">
-              <a:lnSpc>
-                <a:spcPct val="140000"/>
-              </a:lnSpc>
-              <a:spcAft>
-                <a:spcPts val="800"/>
-              </a:spcAft>
-            </a:pPr>
-            <a:r>
-              <a:rPr sz="1400" b="1">
-                <a:solidFill>
-                  <a:srgbClr val="0A1172"/>
-                </a:solidFill>
-                <a:latin typeface="Calibri"/>
-              </a:rPr>
-              <a:t>● </a:t>
-            </a:r>
-            <a:r>
-              <a:rPr sz="1400">
-                <a:solidFill>
-                  <a:srgbClr val="0F2040"/>
-                </a:solidFill>
-                <a:latin typeface="Calibri"/>
-              </a:rPr>
-              <a:t>¿Hay usuarios inactivos con sesiones recientes?</a:t>
-            </a:r>
-          </a:p>
-        </p:txBody>
-      </p:sp>
-      <p:sp>
-        <p:nvSpPr>
-          <p:cNvPr id="11" name="Rectangle 10"/>
-          <p:cNvSpPr/>
-          <p:nvPr/>
-        </p:nvSpPr>
-        <p:spPr>
-          <a:xfrm>
-            <a:off x="0" y="6583680"/>
-            <a:ext cx="12191695" cy="274320"/>
-          </a:xfrm>
-          <a:prstGeom prst="rect">
-            <a:avLst/>
-          </a:prstGeom>
-          <a:solidFill>
-            <a:srgbClr val="0F2040"/>
-          </a:solidFill>
-          <a:ln>
-            <a:noFill/>
-          </a:ln>
-          <a:effectLst/>
-        </p:spPr>
-        <p:style>
-          <a:lnRef idx="1">
-            <a:schemeClr val="accent1"/>
-          </a:lnRef>
-          <a:fillRef idx="3">
-            <a:schemeClr val="accent1"/>
-          </a:fillRef>
-          <a:effectRef idx="2">
-            <a:schemeClr val="accent1"/>
-          </a:effectRef>
-          <a:fontRef idx="minor">
-            <a:schemeClr val="lt1"/>
-          </a:fontRef>
-        </p:style>
-        <p:txBody>
-          <a:bodyPr rtlCol="0" anchor="ctr"/>
-          <a:lstStyle/>
-          <a:p>
-            <a:pPr algn="ctr"/>
-          </a:p>
-        </p:txBody>
-      </p:sp>
-      <p:sp>
-        <p:nvSpPr>
-          <p:cNvPr id="12" name="TextBox 11"/>
-          <p:cNvSpPr txBox="1"/>
-          <p:nvPr/>
-        </p:nvSpPr>
-        <p:spPr>
-          <a:xfrm>
-            <a:off x="365760" y="6583680"/>
-            <a:ext cx="6400800" cy="274320"/>
-          </a:xfrm>
-          <a:prstGeom prst="rect">
-            <a:avLst/>
-          </a:prstGeom>
-          <a:noFill/>
-        </p:spPr>
-        <p:txBody>
-          <a:bodyPr wrap="square" anchor="ctr" lIns="45720" rIns="45720">
-            <a:spAutoFit/>
-          </a:bodyPr>
-          <a:lstStyle/>
-          <a:p>
             <a:pPr algn="l"/>
             <a:r>
               <a:rPr sz="900" b="0">
@@ -6278,7 +5054,7 @@
       </p:sp>
       <p:sp>
         <p:nvSpPr>
-          <p:cNvPr id="13" name="TextBox 12"/>
+          <p:cNvPr id="9" name="TextBox 8"/>
           <p:cNvSpPr txBox="1"/>
           <p:nvPr/>
         </p:nvSpPr>
@@ -6604,15 +5380,7 @@
                 </a:solidFill>
                 <a:latin typeface="Calibri"/>
               </a:rPr>
-              <a:t>El rol Auditor es ESTRICTAMENTE de solo lectura. No puedes:
-✗ Crear, editar o eliminar cualquier registro
-✗ Aprobar o rechazar OT/SC
-✗ Crear usuarios o cambiar permisos
-✗ Exportar reportes a PDF/Excel
-✗ Registrar rondas
-✗ Hacer respaldos o restauraciones
-✗ Cambiar contraseñas de otros usuarios
-Si detectas alguna anomalía, repórtala al administrador.</a:t>
+              <a:t>El rol Auditor es ESTRICTAMENTE de solo lectura. No puedes crear, editar o eliminar nada. No puedes aprobar OT/SC, exportar reportes, registrar rondas, ni hacer respaldos. Si detectas anomalías, reporta al admin.</a:t>
             </a:r>
           </a:p>
         </p:txBody>
@@ -6831,7 +5599,7 @@
                 </a:solidFill>
                 <a:latin typeface="Calibri"/>
               </a:rPr>
-              <a:t>Buenas prácticas</a:t>
+              <a:t>Datos de Acceso</a:t>
             </a:r>
           </a:p>
         </p:txBody>
@@ -6873,20 +5641,182 @@
       </p:sp>
       <p:sp>
         <p:nvSpPr>
-          <p:cNvPr id="5" name="Rounded Rectangle 4"/>
+          <p:cNvPr id="5" name="TextBox 4"/>
+          <p:cNvSpPr txBox="1"/>
+          <p:nvPr/>
+        </p:nvSpPr>
+        <p:spPr>
+          <a:xfrm>
+            <a:off x="457200" y="1005840"/>
+            <a:ext cx="11247120" cy="731520"/>
+          </a:xfrm>
+          <a:prstGeom prst="rect">
+            <a:avLst/>
+          </a:prstGeom>
+          <a:noFill/>
+        </p:spPr>
+        <p:txBody>
+          <a:bodyPr wrap="square" anchor="t" lIns="45720" rIns="45720">
+            <a:spAutoFit/>
+          </a:bodyPr>
+          <a:lstStyle/>
+          <a:p>
+            <a:pPr algn="l"/>
+            <a:r>
+              <a:rPr sz="1400" b="0">
+                <a:solidFill>
+                  <a:srgbClr val="666666"/>
+                </a:solidFill>
+                <a:latin typeface="Calibri"/>
+              </a:rPr>
+              <a:t>Credenciales de prueba:</a:t>
+            </a:r>
+          </a:p>
+        </p:txBody>
+      </p:sp>
+      <p:sp>
+        <p:nvSpPr>
+          <p:cNvPr id="6" name="TextBox 5"/>
+          <p:cNvSpPr txBox="1"/>
+          <p:nvPr/>
+        </p:nvSpPr>
+        <p:spPr>
+          <a:xfrm>
+            <a:off x="640080" y="1828800"/>
+            <a:ext cx="10972800" cy="4572000"/>
+          </a:xfrm>
+          <a:prstGeom prst="rect">
+            <a:avLst/>
+          </a:prstGeom>
+          <a:noFill/>
+        </p:spPr>
+        <p:txBody>
+          <a:bodyPr wrap="square">
+            <a:spAutoFit/>
+          </a:bodyPr>
+          <a:lstStyle/>
+          <a:p>
+            <a:pPr algn="l">
+              <a:lnSpc>
+                <a:spcPct val="140000"/>
+              </a:lnSpc>
+              <a:spcAft>
+                <a:spcPts val="800"/>
+              </a:spcAft>
+            </a:pPr>
+            <a:r>
+              <a:rPr sz="1600" b="1">
+                <a:solidFill>
+                  <a:srgbClr val="666666"/>
+                </a:solidFill>
+              </a:rPr>
+              <a:t>● </a:t>
+            </a:r>
+            <a:r>
+              <a:rPr sz="1600">
+                <a:solidFill>
+                  <a:srgbClr val="0F2040"/>
+                </a:solidFill>
+              </a:rPr>
+              <a:t>URL: https://condominios-cyj.vercel.app</a:t>
+            </a:r>
+          </a:p>
+          <a:p>
+            <a:pPr algn="l">
+              <a:lnSpc>
+                <a:spcPct val="140000"/>
+              </a:lnSpc>
+              <a:spcAft>
+                <a:spcPts val="800"/>
+              </a:spcAft>
+            </a:pPr>
+            <a:r>
+              <a:rPr sz="1600" b="1">
+                <a:solidFill>
+                  <a:srgbClr val="666666"/>
+                </a:solidFill>
+              </a:rPr>
+              <a:t>● </a:t>
+            </a:r>
+            <a:r>
+              <a:rPr sz="1600">
+                <a:solidFill>
+                  <a:srgbClr val="0F2040"/>
+                </a:solidFill>
+              </a:rPr>
+              <a:t>Email: auditor.test@cyj.cl</a:t>
+            </a:r>
+          </a:p>
+          <a:p>
+            <a:pPr algn="l">
+              <a:lnSpc>
+                <a:spcPct val="140000"/>
+              </a:lnSpc>
+              <a:spcAft>
+                <a:spcPts val="800"/>
+              </a:spcAft>
+            </a:pPr>
+            <a:r>
+              <a:rPr sz="1600" b="1">
+                <a:solidFill>
+                  <a:srgbClr val="666666"/>
+                </a:solidFill>
+              </a:rPr>
+              <a:t>● </a:t>
+            </a:r>
+            <a:r>
+              <a:rPr sz="1600">
+                <a:solidFill>
+                  <a:srgbClr val="0F2040"/>
+                </a:solidFill>
+              </a:rPr>
+              <a:t>Contraseña temporal: Auditor2026!</a:t>
+            </a:r>
+          </a:p>
+          <a:p>
+            <a:pPr algn="l">
+              <a:lnSpc>
+                <a:spcPct val="140000"/>
+              </a:lnSpc>
+              <a:spcAft>
+                <a:spcPts val="800"/>
+              </a:spcAft>
+            </a:pPr>
+            <a:r>
+              <a:rPr sz="1600" b="1">
+                <a:solidFill>
+                  <a:srgbClr val="666666"/>
+                </a:solidFill>
+              </a:rPr>
+              <a:t>● </a:t>
+            </a:r>
+            <a:r>
+              <a:rPr sz="1600">
+                <a:solidFill>
+                  <a:srgbClr val="0F2040"/>
+                </a:solidFill>
+              </a:rPr>
+              <a:t>Deberás cambiar la contraseña en el primer login</a:t>
+            </a:r>
+          </a:p>
+        </p:txBody>
+      </p:sp>
+      <p:sp>
+        <p:nvSpPr>
+          <p:cNvPr id="7" name="Rectangle 6"/>
           <p:cNvSpPr/>
           <p:nvPr/>
         </p:nvSpPr>
         <p:spPr>
           <a:xfrm>
-            <a:off x="914400" y="1828800"/>
-            <a:ext cx="10332720" cy="3200400"/>
-          </a:xfrm>
-          <a:prstGeom prst="roundRect">
+            <a:off x="0" y="6583680"/>
+            <a:ext cx="12191695" cy="274320"/>
+          </a:xfrm>
+          <a:prstGeom prst="rect">
             <a:avLst/>
           </a:prstGeom>
           <a:solidFill>
-            <a:srgbClr val="F1F5F9"/>
+            <a:srgbClr val="0F2040"/>
           </a:solidFill>
           <a:ln>
             <a:noFill/>
@@ -6917,20 +5847,116 @@
       </p:sp>
       <p:sp>
         <p:nvSpPr>
-          <p:cNvPr id="6" name="Rectangle 5"/>
+          <p:cNvPr id="8" name="TextBox 7"/>
+          <p:cNvSpPr txBox="1"/>
+          <p:nvPr/>
+        </p:nvSpPr>
+        <p:spPr>
+          <a:xfrm>
+            <a:off x="365760" y="6583680"/>
+            <a:ext cx="6400800" cy="274320"/>
+          </a:xfrm>
+          <a:prstGeom prst="rect">
+            <a:avLst/>
+          </a:prstGeom>
+          <a:noFill/>
+        </p:spPr>
+        <p:txBody>
+          <a:bodyPr wrap="square" anchor="ctr" lIns="45720" rIns="45720">
+            <a:spAutoFit/>
+          </a:bodyPr>
+          <a:lstStyle/>
+          <a:p>
+            <a:pPr algn="l"/>
+            <a:r>
+              <a:rPr sz="900" b="0">
+                <a:solidFill>
+                  <a:srgbClr val="FFFFFF"/>
+                </a:solidFill>
+                <a:latin typeface="Calibri"/>
+              </a:rPr>
+              <a:t>Asesorías Integrales CyJ · Capacitación Auditor</a:t>
+            </a:r>
+          </a:p>
+        </p:txBody>
+      </p:sp>
+      <p:sp>
+        <p:nvSpPr>
+          <p:cNvPr id="9" name="TextBox 8"/>
+          <p:cNvSpPr txBox="1"/>
+          <p:nvPr/>
+        </p:nvSpPr>
+        <p:spPr>
+          <a:xfrm>
+            <a:off x="7315200" y="6583680"/>
+            <a:ext cx="4572000" cy="274320"/>
+          </a:xfrm>
+          <a:prstGeom prst="rect">
+            <a:avLst/>
+          </a:prstGeom>
+          <a:noFill/>
+        </p:spPr>
+        <p:txBody>
+          <a:bodyPr wrap="square" anchor="ctr" lIns="45720" rIns="45720">
+            <a:spAutoFit/>
+          </a:bodyPr>
+          <a:lstStyle/>
+          <a:p>
+            <a:pPr algn="r"/>
+            <a:r>
+              <a:rPr sz="900" b="0">
+                <a:solidFill>
+                  <a:srgbClr val="F59E0B"/>
+                </a:solidFill>
+                <a:latin typeface="Calibri"/>
+              </a:rPr>
+              <a:t>https://condominios-cyj.vercel.app</a:t>
+            </a:r>
+          </a:p>
+        </p:txBody>
+      </p:sp>
+    </p:spTree>
+  </p:cSld>
+  <p:clrMapOvr>
+    <a:masterClrMapping/>
+  </p:clrMapOvr>
+</p:sld>
+</file>
+
+<file path=ppt/slides/slide9.xml><?xml version="1.0" encoding="utf-8"?>
+<p:sld xmlns:a="http://schemas.openxmlformats.org/drawingml/2006/main" xmlns:p="http://schemas.openxmlformats.org/presentationml/2006/main" xmlns:r="http://schemas.openxmlformats.org/officeDocument/2006/relationships">
+  <p:cSld>
+    <p:bg>
+      <p:bgPr>
+        <a:solidFill>
+          <a:srgbClr val="0A1172"/>
+        </a:solidFill>
+        <a:effectLst/>
+      </p:bgPr>
+    </p:bg>
+    <p:spTree>
+      <p:nvGrpSpPr>
+        <p:cNvPr id="1" name=""/>
+        <p:cNvGrpSpPr/>
+        <p:nvPr/>
+      </p:nvGrpSpPr>
+      <p:grpSpPr/>
+      <p:sp>
+        <p:nvSpPr>
+          <p:cNvPr id="2" name="Rectangle 1"/>
           <p:cNvSpPr/>
           <p:nvPr/>
         </p:nvSpPr>
         <p:spPr>
           <a:xfrm>
-            <a:off x="914400" y="1828800"/>
-            <a:ext cx="137160" cy="3200400"/>
+            <a:off x="0" y="0"/>
+            <a:ext cx="365760" cy="6858000"/>
           </a:xfrm>
           <a:prstGeom prst="rect">
             <a:avLst/>
           </a:prstGeom>
           <a:solidFill>
-            <a:srgbClr val="16A34A"/>
+            <a:srgbClr val="666666"/>
           </a:solidFill>
           <a:ln>
             <a:noFill/>
@@ -6961,14 +5987,14 @@
       </p:sp>
       <p:sp>
         <p:nvSpPr>
-          <p:cNvPr id="7" name="TextBox 6"/>
+          <p:cNvPr id="3" name="TextBox 2"/>
           <p:cNvSpPr txBox="1"/>
           <p:nvPr/>
         </p:nvSpPr>
         <p:spPr>
           <a:xfrm>
-            <a:off x="1371600" y="2103120"/>
-            <a:ext cx="1828800" cy="1828800"/>
+            <a:off x="731520" y="2286000"/>
+            <a:ext cx="10698480" cy="914400"/>
           </a:xfrm>
           <a:prstGeom prst="rect">
             <a:avLst/>
@@ -6983,272 +6009,13 @@
           <a:p>
             <a:pPr algn="ctr"/>
             <a:r>
-              <a:rPr sz="8000" b="0">
-                <a:solidFill>
-                  <a:srgbClr val="16A34A"/>
+              <a:rPr sz="7200" b="1">
+                <a:solidFill>
+                  <a:srgbClr val="FFFFFF"/>
                 </a:solidFill>
                 <a:latin typeface="Calibri"/>
               </a:rPr>
-              <a:t>✓</a:t>
-            </a:r>
-          </a:p>
-        </p:txBody>
-      </p:sp>
-      <p:sp>
-        <p:nvSpPr>
-          <p:cNvPr id="8" name="TextBox 7"/>
-          <p:cNvSpPr txBox="1"/>
-          <p:nvPr/>
-        </p:nvSpPr>
-        <p:spPr>
-          <a:xfrm>
-            <a:off x="3474720" y="2103120"/>
-            <a:ext cx="7498079" cy="2743200"/>
-          </a:xfrm>
-          <a:prstGeom prst="rect">
-            <a:avLst/>
-          </a:prstGeom>
-          <a:noFill/>
-        </p:spPr>
-        <p:txBody>
-          <a:bodyPr wrap="square" anchor="ctr" lIns="45720" rIns="45720">
-            <a:spAutoFit/>
-          </a:bodyPr>
-          <a:lstStyle/>
-          <a:p>
-            <a:pPr algn="l"/>
-            <a:r>
-              <a:rPr sz="1800" b="0">
-                <a:solidFill>
-                  <a:srgbClr val="0F2040"/>
-                </a:solidFill>
-                <a:latin typeface="Calibri"/>
-              </a:rPr>
-              <a:t>✓ Documenta tus hallazgos con capturas de pantalla
-✓ Verifica regularmente el módulo Auditoría
-✓ Presta atención a acciones fuera de horario laboral
-✓ Revisa que los flujos de aprobación se cumplan
-✓ Verifica que no haya usuarios con permisos excesivos
-✓ Reporta inmediatamente cualquier actividad sospechosa</a:t>
-            </a:r>
-          </a:p>
-        </p:txBody>
-      </p:sp>
-      <p:sp>
-        <p:nvSpPr>
-          <p:cNvPr id="9" name="Rectangle 8"/>
-          <p:cNvSpPr/>
-          <p:nvPr/>
-        </p:nvSpPr>
-        <p:spPr>
-          <a:xfrm>
-            <a:off x="0" y="6583680"/>
-            <a:ext cx="12191695" cy="274320"/>
-          </a:xfrm>
-          <a:prstGeom prst="rect">
-            <a:avLst/>
-          </a:prstGeom>
-          <a:solidFill>
-            <a:srgbClr val="0F2040"/>
-          </a:solidFill>
-          <a:ln>
-            <a:noFill/>
-          </a:ln>
-          <a:effectLst/>
-        </p:spPr>
-        <p:style>
-          <a:lnRef idx="1">
-            <a:schemeClr val="accent1"/>
-          </a:lnRef>
-          <a:fillRef idx="3">
-            <a:schemeClr val="accent1"/>
-          </a:fillRef>
-          <a:effectRef idx="2">
-            <a:schemeClr val="accent1"/>
-          </a:effectRef>
-          <a:fontRef idx="minor">
-            <a:schemeClr val="lt1"/>
-          </a:fontRef>
-        </p:style>
-        <p:txBody>
-          <a:bodyPr rtlCol="0" anchor="ctr"/>
-          <a:lstStyle/>
-          <a:p>
-            <a:pPr algn="ctr"/>
-          </a:p>
-        </p:txBody>
-      </p:sp>
-      <p:sp>
-        <p:nvSpPr>
-          <p:cNvPr id="10" name="TextBox 9"/>
-          <p:cNvSpPr txBox="1"/>
-          <p:nvPr/>
-        </p:nvSpPr>
-        <p:spPr>
-          <a:xfrm>
-            <a:off x="365760" y="6583680"/>
-            <a:ext cx="6400800" cy="274320"/>
-          </a:xfrm>
-          <a:prstGeom prst="rect">
-            <a:avLst/>
-          </a:prstGeom>
-          <a:noFill/>
-        </p:spPr>
-        <p:txBody>
-          <a:bodyPr wrap="square" anchor="ctr" lIns="45720" rIns="45720">
-            <a:spAutoFit/>
-          </a:bodyPr>
-          <a:lstStyle/>
-          <a:p>
-            <a:pPr algn="l"/>
-            <a:r>
-              <a:rPr sz="900" b="0">
-                <a:solidFill>
-                  <a:srgbClr val="FFFFFF"/>
-                </a:solidFill>
-                <a:latin typeface="Calibri"/>
-              </a:rPr>
-              <a:t>Asesorías Integrales CyJ · Capacitación Auditor</a:t>
-            </a:r>
-          </a:p>
-        </p:txBody>
-      </p:sp>
-      <p:sp>
-        <p:nvSpPr>
-          <p:cNvPr id="11" name="TextBox 10"/>
-          <p:cNvSpPr txBox="1"/>
-          <p:nvPr/>
-        </p:nvSpPr>
-        <p:spPr>
-          <a:xfrm>
-            <a:off x="7315200" y="6583680"/>
-            <a:ext cx="4572000" cy="274320"/>
-          </a:xfrm>
-          <a:prstGeom prst="rect">
-            <a:avLst/>
-          </a:prstGeom>
-          <a:noFill/>
-        </p:spPr>
-        <p:txBody>
-          <a:bodyPr wrap="square" anchor="ctr" lIns="45720" rIns="45720">
-            <a:spAutoFit/>
-          </a:bodyPr>
-          <a:lstStyle/>
-          <a:p>
-            <a:pPr algn="r"/>
-            <a:r>
-              <a:rPr sz="900" b="0">
-                <a:solidFill>
-                  <a:srgbClr val="F59E0B"/>
-                </a:solidFill>
-                <a:latin typeface="Calibri"/>
-              </a:rPr>
-              <a:t>https://condominios-cyj.vercel.app</a:t>
-            </a:r>
-          </a:p>
-        </p:txBody>
-      </p:sp>
-    </p:spTree>
-  </p:cSld>
-  <p:clrMapOvr>
-    <a:masterClrMapping/>
-  </p:clrMapOvr>
-</p:sld>
-</file>
-
-<file path=ppt/slides/slide9.xml><?xml version="1.0" encoding="utf-8"?>
-<p:sld xmlns:a="http://schemas.openxmlformats.org/drawingml/2006/main" xmlns:p="http://schemas.openxmlformats.org/presentationml/2006/main" xmlns:r="http://schemas.openxmlformats.org/officeDocument/2006/relationships">
-  <p:cSld>
-    <p:bg>
-      <p:bgPr>
-        <a:solidFill>
-          <a:srgbClr val="FFFFFF"/>
-        </a:solidFill>
-        <a:effectLst/>
-      </p:bgPr>
-    </p:bg>
-    <p:spTree>
-      <p:nvGrpSpPr>
-        <p:cNvPr id="1" name=""/>
-        <p:cNvGrpSpPr/>
-        <p:nvPr/>
-      </p:nvGrpSpPr>
-      <p:grpSpPr/>
-      <p:sp>
-        <p:nvSpPr>
-          <p:cNvPr id="2" name="Rectangle 1"/>
-          <p:cNvSpPr/>
-          <p:nvPr/>
-        </p:nvSpPr>
-        <p:spPr>
-          <a:xfrm>
-            <a:off x="0" y="0"/>
-            <a:ext cx="12191695" cy="822960"/>
-          </a:xfrm>
-          <a:prstGeom prst="rect">
-            <a:avLst/>
-          </a:prstGeom>
-          <a:solidFill>
-            <a:srgbClr val="0A1172"/>
-          </a:solidFill>
-          <a:ln>
-            <a:noFill/>
-          </a:ln>
-          <a:effectLst/>
-        </p:spPr>
-        <p:style>
-          <a:lnRef idx="1">
-            <a:schemeClr val="accent1"/>
-          </a:lnRef>
-          <a:fillRef idx="3">
-            <a:schemeClr val="accent1"/>
-          </a:fillRef>
-          <a:effectRef idx="2">
-            <a:schemeClr val="accent1"/>
-          </a:effectRef>
-          <a:fontRef idx="minor">
-            <a:schemeClr val="lt1"/>
-          </a:fontRef>
-        </p:style>
-        <p:txBody>
-          <a:bodyPr rtlCol="0" anchor="ctr"/>
-          <a:lstStyle/>
-          <a:p>
-            <a:pPr algn="ctr"/>
-          </a:p>
-        </p:txBody>
-      </p:sp>
-      <p:sp>
-        <p:nvSpPr>
-          <p:cNvPr id="3" name="TextBox 2"/>
-          <p:cNvSpPr txBox="1"/>
-          <p:nvPr/>
-        </p:nvSpPr>
-        <p:spPr>
-          <a:xfrm>
-            <a:off x="365760" y="137160"/>
-            <a:ext cx="10058400" cy="548640"/>
-          </a:xfrm>
-          <a:prstGeom prst="rect">
-            <a:avLst/>
-          </a:prstGeom>
-          <a:noFill/>
-        </p:spPr>
-        <p:txBody>
-          <a:bodyPr wrap="square" anchor="ctr" lIns="45720" rIns="45720">
-            <a:spAutoFit/>
-          </a:bodyPr>
-          <a:lstStyle/>
-          <a:p>
-            <a:pPr algn="l"/>
-            <a:r>
-              <a:rPr sz="2200" b="1">
-                <a:solidFill>
-                  <a:srgbClr val="FFFFFF"/>
-                </a:solidFill>
-                <a:latin typeface="Calibri"/>
-              </a:rPr>
-              <a:t>Datos de Acceso</a:t>
+              <a:t>¡Listo!</a:t>
             </a:r>
           </a:p>
         </p:txBody>
@@ -7261,43 +6028,8 @@
         </p:nvSpPr>
         <p:spPr>
           <a:xfrm>
-            <a:off x="11247120" y="137160"/>
-            <a:ext cx="731520" cy="548640"/>
-          </a:xfrm>
-          <a:prstGeom prst="rect">
-            <a:avLst/>
-          </a:prstGeom>
-          <a:noFill/>
-        </p:spPr>
-        <p:txBody>
-          <a:bodyPr wrap="square" anchor="ctr" lIns="45720" rIns="45720">
-            <a:spAutoFit/>
-          </a:bodyPr>
-          <a:lstStyle/>
-          <a:p>
-            <a:pPr algn="r"/>
-            <a:r>
-              <a:rPr sz="1400" b="0">
-                <a:solidFill>
-                  <a:srgbClr val="F59E0B"/>
-                </a:solidFill>
-                <a:latin typeface="Calibri"/>
-              </a:rPr>
-              <a:t>9</a:t>
-            </a:r>
-          </a:p>
-        </p:txBody>
-      </p:sp>
-      <p:sp>
-        <p:nvSpPr>
-          <p:cNvPr id="5" name="TextBox 4"/>
-          <p:cNvSpPr txBox="1"/>
-          <p:nvPr/>
-        </p:nvSpPr>
-        <p:spPr>
-          <a:xfrm>
-            <a:off x="457200" y="1005840"/>
-            <a:ext cx="11247120" cy="731520"/>
+            <a:off x="731520" y="3474720"/>
+            <a:ext cx="10698480" cy="640080"/>
           </a:xfrm>
           <a:prstGeom prst="rect">
             <a:avLst/>
@@ -7310,15 +6042,50 @@
           </a:bodyPr>
           <a:lstStyle/>
           <a:p>
-            <a:pPr algn="l"/>
-            <a:r>
-              <a:rPr sz="1400" b="0">
-                <a:solidFill>
-                  <a:srgbClr val="666666"/>
+            <a:pPr algn="ctr"/>
+            <a:r>
+              <a:rPr sz="2200" b="0">
+                <a:solidFill>
+                  <a:srgbClr val="F1F5F9"/>
                 </a:solidFill>
                 <a:latin typeface="Calibri"/>
               </a:rPr>
-              <a:t>Credenciales de prueba para capacitación:</a:t>
+              <a:t>Ya puedes comenzar a usar el sistema como Auditor</a:t>
+            </a:r>
+          </a:p>
+        </p:txBody>
+      </p:sp>
+      <p:sp>
+        <p:nvSpPr>
+          <p:cNvPr id="5" name="TextBox 4"/>
+          <p:cNvSpPr txBox="1"/>
+          <p:nvPr/>
+        </p:nvSpPr>
+        <p:spPr>
+          <a:xfrm>
+            <a:off x="731520" y="4754880"/>
+            <a:ext cx="10698480" cy="457200"/>
+          </a:xfrm>
+          <a:prstGeom prst="rect">
+            <a:avLst/>
+          </a:prstGeom>
+          <a:noFill/>
+        </p:spPr>
+        <p:txBody>
+          <a:bodyPr wrap="square" anchor="t" lIns="45720" rIns="45720">
+            <a:spAutoFit/>
+          </a:bodyPr>
+          <a:lstStyle/>
+          <a:p>
+            <a:pPr algn="ctr"/>
+            <a:r>
+              <a:rPr sz="1400" b="0">
+                <a:solidFill>
+                  <a:srgbClr val="F59E0B"/>
+                </a:solidFill>
+                <a:latin typeface="Calibri"/>
+              </a:rPr>
+              <a:t>Si tienes dudas, consulta el Manual de Usuario o contacta al administrador</a:t>
             </a:r>
           </a:p>
         </p:txBody>
@@ -7331,8 +6098,8 @@
         </p:nvSpPr>
         <p:spPr>
           <a:xfrm>
-            <a:off x="640080" y="1828800"/>
-            <a:ext cx="10972800" cy="4572000"/>
+            <a:off x="731520" y="5852160"/>
+            <a:ext cx="10698480" cy="457200"/>
           </a:xfrm>
           <a:prstGeom prst="rect">
             <a:avLst/>
@@ -7340,262 +6107,20 @@
           <a:noFill/>
         </p:spPr>
         <p:txBody>
-          <a:bodyPr wrap="square">
+          <a:bodyPr wrap="square" anchor="t" lIns="45720" rIns="45720">
             <a:spAutoFit/>
           </a:bodyPr>
           <a:lstStyle/>
           <a:p>
-            <a:pPr algn="l">
-              <a:lnSpc>
-                <a:spcPct val="140000"/>
-              </a:lnSpc>
-              <a:spcAft>
-                <a:spcPts val="800"/>
-              </a:spcAft>
-            </a:pPr>
-            <a:r>
-              <a:rPr sz="1600" b="1">
-                <a:solidFill>
-                  <a:srgbClr val="666666"/>
+            <a:pPr algn="ctr"/>
+            <a:r>
+              <a:rPr sz="1400" b="1">
+                <a:solidFill>
+                  <a:srgbClr val="FFFFFF"/>
                 </a:solidFill>
                 <a:latin typeface="Calibri"/>
               </a:rPr>
-              <a:t>● </a:t>
-            </a:r>
-            <a:r>
-              <a:rPr sz="1600">
-                <a:solidFill>
-                  <a:srgbClr val="0F2040"/>
-                </a:solidFill>
-                <a:latin typeface="Calibri"/>
-              </a:rPr>
-              <a:t>URL: https://condominios-cyj.vercel.app</a:t>
-            </a:r>
-          </a:p>
-          <a:p>
-            <a:pPr algn="l">
-              <a:lnSpc>
-                <a:spcPct val="140000"/>
-              </a:lnSpc>
-              <a:spcAft>
-                <a:spcPts val="800"/>
-              </a:spcAft>
-            </a:pPr>
-            <a:r>
-              <a:rPr sz="1600" b="1">
-                <a:solidFill>
-                  <a:srgbClr val="666666"/>
-                </a:solidFill>
-                <a:latin typeface="Calibri"/>
-              </a:rPr>
-              <a:t>● </a:t>
-            </a:r>
-            <a:r>
-              <a:rPr sz="1600">
-                <a:solidFill>
-                  <a:srgbClr val="0F2040"/>
-                </a:solidFill>
-                <a:latin typeface="Calibri"/>
-              </a:rPr>
-              <a:t>Email: auditor.test@cyj.cl</a:t>
-            </a:r>
-          </a:p>
-          <a:p>
-            <a:pPr algn="l">
-              <a:lnSpc>
-                <a:spcPct val="140000"/>
-              </a:lnSpc>
-              <a:spcAft>
-                <a:spcPts val="800"/>
-              </a:spcAft>
-            </a:pPr>
-            <a:r>
-              <a:rPr sz="1600" b="1">
-                <a:solidFill>
-                  <a:srgbClr val="666666"/>
-                </a:solidFill>
-                <a:latin typeface="Calibri"/>
-              </a:rPr>
-              <a:t>● </a:t>
-            </a:r>
-            <a:r>
-              <a:rPr sz="1600">
-                <a:solidFill>
-                  <a:srgbClr val="0F2040"/>
-                </a:solidFill>
-                <a:latin typeface="Calibri"/>
-              </a:rPr>
-              <a:t>Contraseña temporal: Auditor2026!</a:t>
-            </a:r>
-          </a:p>
-          <a:p>
-            <a:pPr algn="l">
-              <a:lnSpc>
-                <a:spcPct val="140000"/>
-              </a:lnSpc>
-              <a:spcAft>
-                <a:spcPts val="800"/>
-              </a:spcAft>
-            </a:pPr>
-            <a:r>
-              <a:rPr sz="1600" b="1">
-                <a:solidFill>
-                  <a:srgbClr val="666666"/>
-                </a:solidFill>
-                <a:latin typeface="Calibri"/>
-              </a:rPr>
-              <a:t>● </a:t>
-            </a:r>
-            <a:r>
-              <a:rPr sz="1600">
-                <a:solidFill>
-                  <a:srgbClr val="0F2040"/>
-                </a:solidFill>
-                <a:latin typeface="Calibri"/>
-              </a:rPr>
-              <a:t>Deberás cambiar la contraseña en el primer login</a:t>
-            </a:r>
-          </a:p>
-          <a:p>
-            <a:pPr algn="l">
-              <a:lnSpc>
-                <a:spcPct val="140000"/>
-              </a:lnSpc>
-              <a:spcAft>
-                <a:spcPts val="800"/>
-              </a:spcAft>
-            </a:pPr>
-            <a:r>
-              <a:rPr sz="1600" b="1">
-                <a:solidFill>
-                  <a:srgbClr val="666666"/>
-                </a:solidFill>
-                <a:latin typeface="Calibri"/>
-              </a:rPr>
-              <a:t>● </a:t>
-            </a:r>
-            <a:r>
-              <a:rPr sz="1600">
-                <a:solidFill>
-                  <a:srgbClr val="0F2040"/>
-                </a:solidFill>
-                <a:latin typeface="Calibri"/>
-              </a:rPr>
-              <a:t>Página de inicio: /sistema (dashboard)</a:t>
-            </a:r>
-          </a:p>
-        </p:txBody>
-      </p:sp>
-      <p:sp>
-        <p:nvSpPr>
-          <p:cNvPr id="7" name="Rectangle 6"/>
-          <p:cNvSpPr/>
-          <p:nvPr/>
-        </p:nvSpPr>
-        <p:spPr>
-          <a:xfrm>
-            <a:off x="0" y="6583680"/>
-            <a:ext cx="12191695" cy="274320"/>
-          </a:xfrm>
-          <a:prstGeom prst="rect">
-            <a:avLst/>
-          </a:prstGeom>
-          <a:solidFill>
-            <a:srgbClr val="0F2040"/>
-          </a:solidFill>
-          <a:ln>
-            <a:noFill/>
-          </a:ln>
-          <a:effectLst/>
-        </p:spPr>
-        <p:style>
-          <a:lnRef idx="1">
-            <a:schemeClr val="accent1"/>
-          </a:lnRef>
-          <a:fillRef idx="3">
-            <a:schemeClr val="accent1"/>
-          </a:fillRef>
-          <a:effectRef idx="2">
-            <a:schemeClr val="accent1"/>
-          </a:effectRef>
-          <a:fontRef idx="minor">
-            <a:schemeClr val="lt1"/>
-          </a:fontRef>
-        </p:style>
-        <p:txBody>
-          <a:bodyPr rtlCol="0" anchor="ctr"/>
-          <a:lstStyle/>
-          <a:p>
-            <a:pPr algn="ctr"/>
-          </a:p>
-        </p:txBody>
-      </p:sp>
-      <p:sp>
-        <p:nvSpPr>
-          <p:cNvPr id="8" name="TextBox 7"/>
-          <p:cNvSpPr txBox="1"/>
-          <p:nvPr/>
-        </p:nvSpPr>
-        <p:spPr>
-          <a:xfrm>
-            <a:off x="365760" y="6583680"/>
-            <a:ext cx="6400800" cy="274320"/>
-          </a:xfrm>
-          <a:prstGeom prst="rect">
-            <a:avLst/>
-          </a:prstGeom>
-          <a:noFill/>
-        </p:spPr>
-        <p:txBody>
-          <a:bodyPr wrap="square" anchor="ctr" lIns="45720" rIns="45720">
-            <a:spAutoFit/>
-          </a:bodyPr>
-          <a:lstStyle/>
-          <a:p>
-            <a:pPr algn="l"/>
-            <a:r>
-              <a:rPr sz="900" b="0">
-                <a:solidFill>
-                  <a:srgbClr val="FFFFFF"/>
-                </a:solidFill>
-                <a:latin typeface="Calibri"/>
-              </a:rPr>
-              <a:t>Asesorías Integrales CyJ · Capacitación Auditor</a:t>
-            </a:r>
-          </a:p>
-        </p:txBody>
-      </p:sp>
-      <p:sp>
-        <p:nvSpPr>
-          <p:cNvPr id="9" name="TextBox 8"/>
-          <p:cNvSpPr txBox="1"/>
-          <p:nvPr/>
-        </p:nvSpPr>
-        <p:spPr>
-          <a:xfrm>
-            <a:off x="7315200" y="6583680"/>
-            <a:ext cx="4572000" cy="274320"/>
-          </a:xfrm>
-          <a:prstGeom prst="rect">
-            <a:avLst/>
-          </a:prstGeom>
-          <a:noFill/>
-        </p:spPr>
-        <p:txBody>
-          <a:bodyPr wrap="square" anchor="ctr" lIns="45720" rIns="45720">
-            <a:spAutoFit/>
-          </a:bodyPr>
-          <a:lstStyle/>
-          <a:p>
-            <a:pPr algn="r"/>
-            <a:r>
-              <a:rPr sz="900" b="0">
-                <a:solidFill>
-                  <a:srgbClr val="F59E0B"/>
-                </a:solidFill>
-                <a:latin typeface="Calibri"/>
-              </a:rPr>
-              <a:t>https://condominios-cyj.vercel.app</a:t>
+              <a:t>asesoriasintegralescyj@gmail.com  ·  +56 964 650 643</a:t>
             </a:r>
           </a:p>
         </p:txBody>
